--- a/Lectures/week11/week11.pptx
+++ b/Lectures/week11/week11.pptx
@@ -20,6 +20,8 @@
     <p:sldId id="268" r:id="rId20"/>
     <p:sldId id="269" r:id="rId21"/>
     <p:sldId id="270" r:id="rId22"/>
+    <p:sldId id="271" r:id="rId23"/>
+    <p:sldId id="272" r:id="rId24"/>
   </p:sldIdLst>
   <p:sldSz cx="12191695" cy="6858000" type="screen4x3"/>
   <p:notesSz cx="6858000" cy="9144000"/>
@@ -650,7 +652,82 @@
           <a:lstStyle/>
           <a:p>
             <a:r>
-              <a:t>Part three. Twenty minutes. This one needs no tool at all.</a:t>
+              <a:t>A practical difficulty: the bottleneck is recall, not writing. You know these terms perfectly</a:t>
+            </a:r>
+          </a:p>
+          <a:p>
+            <a:r>
+              <a:t>well. You cannot list them on demand, because expertise doesn't come with an index — which is</a:t>
+            </a:r>
+          </a:p>
+          <a:p>
+            <a:r>
+              <a:t>exactly the knowledge bottleneck that killed the age of rules in week two, showing up in your own</a:t>
+            </a:r>
+          </a:p>
+          <a:p>
+            <a:r>
+              <a:t>life.</a:t>
+            </a:r>
+          </a:p>
+          <a:p/>
+          <a:p>
+            <a:r>
+              <a:t>Three prompts that surface them reliably.</a:t>
+            </a:r>
+          </a:p>
+          <a:p/>
+          <a:p>
+            <a:r>
+              <a:t>What did I have to explain to the last new colleague who joined? Whatever you explained is</a:t>
+            </a:r>
+          </a:p>
+          <a:p>
+            <a:r>
+              <a:t>exactly what isn't obvious, and you have a recent memory of it.</a:t>
+            </a:r>
+          </a:p>
+          <a:p/>
+          <a:p>
+            <a:r>
+              <a:t>What has someone from another department misunderstood in the last year? Cross-department</a:t>
+            </a:r>
+          </a:p>
+          <a:p>
+            <a:r>
+              <a:t>misunderstandings almost always come from a term that means two things. Those are your</a:t>
+            </a:r>
+          </a:p>
+          <a:p>
+            <a:r>
+              <a:t>highest-value entries.</a:t>
+            </a:r>
+          </a:p>
+          <a:p/>
+          <a:p>
+            <a:r>
+              <a:t>And which words would mean something different in a textbook than they mean here? That's the</a:t>
+            </a:r>
+          </a:p>
+          <a:p>
+            <a:r>
+              <a:t>gap between the general usage the model learned and your local usage.</a:t>
+            </a:r>
+          </a:p>
+          <a:p/>
+          <a:p>
+            <a:r>
+              <a:t>Ten terms is enough to start. And the pack improves every time something goes wrong — when</a:t>
+            </a:r>
+          </a:p>
+          <a:p>
+            <a:r>
+              <a:t>output is subtly off, ask which term it misread, and add that one. After six months you have</a:t>
+            </a:r>
+          </a:p>
+          <a:p>
+            <a:r>
+              <a:t>something genuinely valuable that nobody sat down to write.</a:t>
             </a:r>
           </a:p>
         </p:txBody>
@@ -720,82 +797,101 @@
           <a:lstStyle/>
           <a:p>
             <a:r>
-              <a:t>Twenty minutes, and this activity needs no tool at all for the first three steps — pen and</a:t>
-            </a:r>
-          </a:p>
-          <a:p>
-            <a:r>
-              <a:t>paper works.</a:t>
+              <a:t>Risk is not distributed evenly, and this is where the cross-disciplinary nature of this room is</a:t>
+            </a:r>
+          </a:p>
+          <a:p>
+            <a:r>
+              <a:t>genuinely useful — you get to see how differently the same tool sits in different hands.</a:t>
             </a:r>
           </a:p>
           <a:p/>
           <a:p>
             <a:r>
-              <a:t>One. Glossary, ten terms minimum. Prioritise terms that mean something different outside your</a:t>
-            </a:r>
-          </a:p>
-          <a:p>
-            <a:r>
-              <a:t>institution, because those are where the averaged meaning actively misleads.</a:t>
+              <a:t>The same output quality carries very different consequences.</a:t>
             </a:r>
           </a:p>
           <a:p/>
           <a:p>
             <a:r>
-              <a:t>Two. One golden example. A real, approved, anonymised output from your field. And anonymise</a:t>
-            </a:r>
-          </a:p>
-          <a:p>
-            <a:r>
-              <a:t>properly — no names, no dates, no identifiers, no unusual details that would identify someone</a:t>
-            </a:r>
-          </a:p>
-          <a:p>
-            <a:r>
-              <a:t>in a small population. If you're unsure whether it's anonymous enough, it isn't. Use a textbook</a:t>
-            </a:r>
-          </a:p>
-          <a:p>
-            <a:r>
-              <a:t>example instead.</a:t>
+              <a:t>A fabricated citation in a brainstorm: a nuisance. You notice, you move on.</a:t>
             </a:r>
           </a:p>
           <a:p/>
           <a:p>
             <a:r>
-              <a:t>Three. Output conventions: sections in order, plus the restraint. And write the restraint as a</a:t>
-            </a:r>
-          </a:p>
-          <a:p>
-            <a:r>
-              <a:t>"never" statement. "Never state a diagnosis." "Never cite a case." "Never predict an individual</a:t>
-            </a:r>
-          </a:p>
-          <a:p>
-            <a:r>
-              <a:t>student's result." Those are the lines that make output safe.</a:t>
+              <a:t>The same fabricated citation in a filed legal document: sanctions. Real ones, imposed on real</a:t>
+            </a:r>
+          </a:p>
+          <a:p>
+            <a:r>
+              <a:t>lawyers.</a:t>
             </a:r>
           </a:p>
           <a:p/>
           <a:p>
             <a:r>
-              <a:t>Four. Add it to your week ten design and run one test. Compare output with and without the</a:t>
-            </a:r>
-          </a:p>
-          <a:p>
-            <a:r>
-              <a:t>pack. That comparison is the whole point — most people are surprised by how much changes.</a:t>
+              <a:t>A fabricated drug interaction in a discharge summary: a safety incident, and potentially</a:t>
+            </a:r>
+          </a:p>
+          <a:p>
+            <a:r>
+              <a:t>someone harmed.</a:t>
             </a:r>
           </a:p>
           <a:p/>
           <a:p>
             <a:r>
-              <a:t>[If nobody is building, write a glossary and conventions on screen for whichever discipline is</a:t>
-            </a:r>
-          </a:p>
-          <a:p>
-            <a:r>
-              <a:t>best represented, and take terms from the room. This works as a discussion.]</a:t>
+              <a:t>A wrong deadline in a student email: recoverable — unless they miss the resit, in which case it</a:t>
+            </a:r>
+          </a:p>
+          <a:p>
+            <a:r>
+              <a:t>isn't.</a:t>
+            </a:r>
+          </a:p>
+          <a:p/>
+          <a:p>
+            <a:r>
+              <a:t>Notice that the *system* is identical in all four cases. The failure rate is identical. What</a:t>
+            </a:r>
+          </a:p>
+          <a:p>
+            <a:r>
+              <a:t>differs entirely is what happens afterwards.</a:t>
+            </a:r>
+          </a:p>
+          <a:p/>
+          <a:p>
+            <a:r>
+              <a:t>So the bold line: the same system needs different handling in different hands. Higher risk means</a:t>
+            </a:r>
+          </a:p>
+          <a:p>
+            <a:r>
+              <a:t>more constraint, more quoting, earlier human review, narrower scope.</a:t>
+            </a:r>
+          </a:p>
+          <a:p/>
+          <a:p>
+            <a:r>
+              <a:t>That's why I can't give this room a single set of rules. What's proportionate for a marketing</a:t>
+            </a:r>
+          </a:p>
+          <a:p>
+            <a:r>
+              <a:t>draft is negligent for a clinical note, and what's proportionate for a clinical note would make</a:t>
+            </a:r>
+          </a:p>
+          <a:p>
+            <a:r>
+              <a:t>a marketing workflow useless.</a:t>
+            </a:r>
+          </a:p>
+          <a:p/>
+          <a:p>
+            <a:r>
+              <a:t>Calibrating that is a professional judgment, and it's yours to make in your own field.</a:t>
             </a:r>
           </a:p>
         </p:txBody>
@@ -865,87 +961,7 @@
           <a:lstStyle/>
           <a:p>
             <a:r>
-              <a:t>Be precise about what you've bought, because this is the slide where students most often</a:t>
-            </a:r>
-          </a:p>
-          <a:p>
-            <a:r>
-              <a:t>over-conclude.</a:t>
-            </a:r>
-          </a:p>
-          <a:p/>
-          <a:p>
-            <a:r>
-              <a:t>What it changes. Vocabulary becomes local. Structure becomes recognisable. Restraint appears</a:t>
-            </a:r>
-          </a:p>
-          <a:p>
-            <a:r>
-              <a:t>where it was absent. Output stops looking like the internet and starts looking like your</a:t>
-            </a:r>
-          </a:p>
-          <a:p>
-            <a:r>
-              <a:t>institution.</a:t>
-            </a:r>
-          </a:p>
-          <a:p/>
-          <a:p>
-            <a:r>
-              <a:t>What it does not change: accuracy. Not at all. A beautifully formatted SOAP note can contain a</a:t>
-            </a:r>
-          </a:p>
-          <a:p>
-            <a:r>
-              <a:t>completely fabricated finding, sitting in the Objective section, looking exactly like a</a:t>
-            </a:r>
-          </a:p>
-          <a:p>
-            <a:r>
-              <a:t>measurement.</a:t>
-            </a:r>
-          </a:p>
-          <a:p/>
-          <a:p>
-            <a:r>
-              <a:t>And read the second sub-point carefully, because it's the uncomfortable one. If anything,</a:t>
-            </a:r>
-          </a:p>
-          <a:p>
-            <a:r>
-              <a:t>professional formatting makes wrong content *more* persuasive, not less. You've taken output</a:t>
-            </a:r>
-          </a:p>
-          <a:p>
-            <a:r>
-              <a:t>with a known error rate and dressed it in the visual language of professional authority. A</a:t>
-            </a:r>
-          </a:p>
-          <a:p>
-            <a:r>
-              <a:t>colleague glancing at it will trust it more than they would have trusted the generic version.</a:t>
-            </a:r>
-          </a:p>
-          <a:p/>
-          <a:p>
-            <a:r>
-              <a:t>So you've increased both usefulness and risk simultaneously.</a:t>
-            </a:r>
-          </a:p>
-          <a:p/>
-          <a:p>
-            <a:r>
-              <a:t>Which is why the bold line matters: a Domain Pack makes output usable. Grounding and testing</a:t>
-            </a:r>
-          </a:p>
-          <a:p>
-            <a:r>
-              <a:t>make it trustworthy. You need all three, and doing only this one leaves you worse off than</a:t>
-            </a:r>
-          </a:p>
-          <a:p>
-            <a:r>
-              <a:t>doing none.</a:t>
+              <a:t>Part three. Twenty minutes. This one needs no tool at all.</a:t>
             </a:r>
           </a:p>
         </p:txBody>
@@ -1015,57 +1031,82 @@
           <a:lstStyle/>
           <a:p>
             <a:r>
-              <a:t>What's examinable. Five items.</a:t>
+              <a:t>Twenty minutes, and this activity needs no tool at all for the first three steps — pen and</a:t>
+            </a:r>
+          </a:p>
+          <a:p>
+            <a:r>
+              <a:t>paper works.</a:t>
             </a:r>
           </a:p>
           <a:p/>
           <a:p>
             <a:r>
-              <a:t>The Domain Pack and its three components, including the edge-case example and the restraint</a:t>
-            </a:r>
-          </a:p>
-          <a:p>
-            <a:r>
-              <a:t>statements.</a:t>
+              <a:t>One. Glossary, ten terms minimum. Prioritise terms that mean something different outside your</a:t>
+            </a:r>
+          </a:p>
+          <a:p>
+            <a:r>
+              <a:t>institution, because those are where the averaged meaning actively misleads.</a:t>
             </a:r>
           </a:p>
           <a:p/>
           <a:p>
             <a:r>
-              <a:t>Why professional structures exist — each makes a particular error visible. Be ready to explain</a:t>
-            </a:r>
-          </a:p>
-          <a:p>
-            <a:r>
-              <a:t>SOAP's S/O split and IRAC's rule-before-application. That's a strong short-answer question.</a:t>
+              <a:t>Two. One golden example. A real, approved, anonymised output from your field. And anonymise</a:t>
+            </a:r>
+          </a:p>
+          <a:p>
+            <a:r>
+              <a:t>properly — no names, no dates, no identifiers, no unusual details that would identify someone</a:t>
+            </a:r>
+          </a:p>
+          <a:p>
+            <a:r>
+              <a:t>in a small population. If you're unsure whether it's anonymous enough, it isn't. Use a textbook</a:t>
+            </a:r>
+          </a:p>
+          <a:p>
+            <a:r>
+              <a:t>example instead.</a:t>
             </a:r>
           </a:p>
           <a:p/>
           <a:p>
             <a:r>
-              <a:t>The three gaps in generic output: local vocabulary, expected shape, conventional restraint.</a:t>
+              <a:t>Three. Output conventions: sections in order, plus the restraint. And write the restraint as a</a:t>
+            </a:r>
+          </a:p>
+          <a:p>
+            <a:r>
+              <a:t>"never" statement. "Never state a diagnosis." "Never cite a case." "Never predict an individual</a:t>
+            </a:r>
+          </a:p>
+          <a:p>
+            <a:r>
+              <a:t>student's result." Those are the lines that make output safe.</a:t>
             </a:r>
           </a:p>
           <a:p/>
           <a:p>
             <a:r>
-              <a:t>Risk varies by field rather than by system. Expect a scenario asking why the same assistant</a:t>
-            </a:r>
-          </a:p>
-          <a:p>
-            <a:r>
-              <a:t>needs different controls in a clinic and a marketing department.</a:t>
+              <a:t>Four. Add it to your week ten design and run one test. Compare output with and without the</a:t>
+            </a:r>
+          </a:p>
+          <a:p>
+            <a:r>
+              <a:t>pack. That comparison is the whole point — most people are surprised by how much changes.</a:t>
             </a:r>
           </a:p>
           <a:p/>
           <a:p>
             <a:r>
-              <a:t>And formatting is not accuracy — with the sting in the tail: professional formatting can</a:t>
-            </a:r>
-          </a:p>
-          <a:p>
-            <a:r>
-              <a:t>increase over-trust. That's a likely question because it's counterintuitive.</a:t>
+              <a:t>[If nobody is building, write a glossary and conventions on screen for whichever discipline is</a:t>
+            </a:r>
+          </a:p>
+          <a:p>
+            <a:r>
+              <a:t>best represented, and take terms from the room. This works as a discussion.]</a:t>
             </a:r>
           </a:p>
         </p:txBody>
@@ -1135,79 +1176,87 @@
           <a:lstStyle/>
           <a:p>
             <a:r>
-              <a:t>Five things.</a:t>
+              <a:t>Be precise about what you've bought, because this is the slide where students most often</a:t>
+            </a:r>
+          </a:p>
+          <a:p>
+            <a:r>
+              <a:t>over-conclude.</a:t>
             </a:r>
           </a:p>
           <a:p/>
           <a:p>
             <a:r>
-              <a:t>Generic output fails on vocabulary, shape and restraint — not usually on facts. Which is why</a:t>
-            </a:r>
-          </a:p>
-          <a:p>
-            <a:r>
-              <a:t>people dismiss the problem as cosmetic and why they're wrong to.</a:t>
+              <a:t>What it changes. Vocabulary becomes local. Structure becomes recognisable. Restraint appears</a:t>
+            </a:r>
+          </a:p>
+          <a:p>
+            <a:r>
+              <a:t>where it was absent. Output stops looking like the internet and starts looking like your</a:t>
+            </a:r>
+          </a:p>
+          <a:p>
+            <a:r>
+              <a:t>institution.</a:t>
             </a:r>
           </a:p>
           <a:p/>
           <a:p>
             <a:r>
-              <a:t>A Domain Pack is a glossary, golden examples, and output conventions. Written once, reused</a:t>
-            </a:r>
-          </a:p>
-          <a:p>
-            <a:r>
-              <a:t>forever. Genuinely, keep yours.</a:t>
+              <a:t>What it does not change: accuracy. Not at all. A beautifully formatted SOAP note can contain a</a:t>
+            </a:r>
+          </a:p>
+          <a:p>
+            <a:r>
+              <a:t>completely fabricated finding, sitting in the Objective section, looking exactly like a</a:t>
+            </a:r>
+          </a:p>
+          <a:p>
+            <a:r>
+              <a:t>measurement.</a:t>
             </a:r>
           </a:p>
           <a:p/>
           <a:p>
             <a:r>
-              <a:t>Professional structures exist to make specific errors visible. That's the design principle</a:t>
-            </a:r>
-          </a:p>
-          <a:p>
-            <a:r>
-              <a:t>worth carrying.</a:t>
+              <a:t>And read the second sub-point carefully, because it's the uncomfortable one. If anything,</a:t>
+            </a:r>
+          </a:p>
+          <a:p>
+            <a:r>
+              <a:t>professional formatting makes wrong content *more* persuasive, not less. You've taken output</a:t>
+            </a:r>
+          </a:p>
+          <a:p>
+            <a:r>
+              <a:t>with a known error rate and dressed it in the visual language of professional authority. A</a:t>
+            </a:r>
+          </a:p>
+          <a:p>
+            <a:r>
+              <a:t>colleague glancing at it will trust it more than they would have trusted the generic version.</a:t>
             </a:r>
           </a:p>
           <a:p/>
           <a:p>
             <a:r>
-              <a:t>Formatting makes output usable and more persuasive. It does not make it correct — and the gap</a:t>
-            </a:r>
-          </a:p>
-          <a:p>
-            <a:r>
-              <a:t>between those two is where professional harm happens.</a:t>
+              <a:t>So you've increased both usefulness and risk simultaneously.</a:t>
             </a:r>
           </a:p>
           <a:p/>
           <a:p>
             <a:r>
-              <a:t>And risk varies by field. Higher stakes need more constraint and earlier review.</a:t>
-            </a:r>
-          </a:p>
-          <a:p/>
-          <a:p>
-            <a:r>
-              <a:t>Next week is the one people remember. We attack an assistant together — I've built one for the</a:t>
-            </a:r>
-          </a:p>
-          <a:p>
-            <a:r>
-              <a:t>purpose and I'd like you to break it. You'll see how little effort it takes, and then we'll fix</a:t>
-            </a:r>
-          </a:p>
-          <a:p>
-            <a:r>
-              <a:t>it, and then you'll know what to check in anything you build.</a:t>
-            </a:r>
-          </a:p>
-          <a:p/>
-          <a:p>
-            <a:r>
-              <a:t>Bring a laptop if you can. Questions?</a:t>
+              <a:t>Which is why the bold line matters: a Domain Pack makes output usable. Grounding and testing</a:t>
+            </a:r>
+          </a:p>
+          <a:p>
+            <a:r>
+              <a:t>make it trustworthy. You need all three, and doing only this one leaves you worse off than</a:t>
+            </a:r>
+          </a:p>
+          <a:p>
+            <a:r>
+              <a:t>doing none.</a:t>
             </a:r>
           </a:p>
         </p:txBody>
@@ -1277,6 +1326,268 @@
           <a:lstStyle/>
           <a:p>
             <a:r>
+              <a:t>What's examinable. Five items.</a:t>
+            </a:r>
+          </a:p>
+          <a:p/>
+          <a:p>
+            <a:r>
+              <a:t>The Domain Pack and its three components, including the edge-case example and the restraint</a:t>
+            </a:r>
+          </a:p>
+          <a:p>
+            <a:r>
+              <a:t>statements.</a:t>
+            </a:r>
+          </a:p>
+          <a:p/>
+          <a:p>
+            <a:r>
+              <a:t>Why professional structures exist — each makes a particular error visible. Be ready to explain</a:t>
+            </a:r>
+          </a:p>
+          <a:p>
+            <a:r>
+              <a:t>SOAP's S/O split and IRAC's rule-before-application. That's a strong short-answer question.</a:t>
+            </a:r>
+          </a:p>
+          <a:p/>
+          <a:p>
+            <a:r>
+              <a:t>The three gaps in generic output: local vocabulary, expected shape, conventional restraint.</a:t>
+            </a:r>
+          </a:p>
+          <a:p/>
+          <a:p>
+            <a:r>
+              <a:t>Risk varies by field rather than by system. Expect a scenario asking why the same assistant</a:t>
+            </a:r>
+          </a:p>
+          <a:p>
+            <a:r>
+              <a:t>needs different controls in a clinic and a marketing department.</a:t>
+            </a:r>
+          </a:p>
+          <a:p/>
+          <a:p>
+            <a:r>
+              <a:t>And formatting is not accuracy — with the sting in the tail: professional formatting can</a:t>
+            </a:r>
+          </a:p>
+          <a:p>
+            <a:r>
+              <a:t>increase over-trust. That's a likely question because it's counterintuitive.</a:t>
+            </a:r>
+          </a:p>
+        </p:txBody>
+      </p:sp>
+      <p:sp>
+        <p:nvSpPr>
+          <p:cNvPr id="4" name="Slide Number Placeholder 3"/>
+          <p:cNvSpPr>
+            <a:spLocks noGrp="1"/>
+          </p:cNvSpPr>
+          <p:nvPr>
+            <p:ph type="sldNum" idx="5" sz="quarter"/>
+          </p:nvPr>
+        </p:nvSpPr>
+        <p:spPr/>
+      </p:sp>
+    </p:spTree>
+  </p:cSld>
+  <p:clrMapOvr>
+    <a:masterClrMapping/>
+  </p:clrMapOvr>
+</p:notes>
+</file>
+
+<file path=ppt/notesSlides/notesSlide16.xml><?xml version="1.0" encoding="utf-8"?>
+<p:notes xmlns:a="http://schemas.openxmlformats.org/drawingml/2006/main" xmlns:p="http://schemas.openxmlformats.org/presentationml/2006/main" xmlns:r="http://schemas.openxmlformats.org/officeDocument/2006/relationships">
+  <p:cSld>
+    <p:spTree>
+      <p:nvGrpSpPr>
+        <p:cNvPr id="1" name=""/>
+        <p:cNvGrpSpPr/>
+        <p:nvPr/>
+      </p:nvGrpSpPr>
+      <p:grpSpPr>
+        <a:xfrm>
+          <a:off x="0" y="0"/>
+          <a:ext cx="0" cy="0"/>
+          <a:chOff x="0" y="0"/>
+          <a:chExt cx="0" cy="0"/>
+        </a:xfrm>
+      </p:grpSpPr>
+      <p:sp>
+        <p:nvSpPr>
+          <p:cNvPr id="2" name="Slide Image Placeholder 1"/>
+          <p:cNvSpPr>
+            <a:spLocks noGrp="1"/>
+          </p:cNvSpPr>
+          <p:nvPr>
+            <p:ph type="sldImg" idx="2"/>
+          </p:nvPr>
+        </p:nvSpPr>
+        <p:spPr/>
+      </p:sp>
+      <p:sp>
+        <p:nvSpPr>
+          <p:cNvPr id="3" name="Notes Placeholder 2"/>
+          <p:cNvSpPr>
+            <a:spLocks noGrp="1"/>
+          </p:cNvSpPr>
+          <p:nvPr>
+            <p:ph type="body" idx="3" sz="quarter"/>
+          </p:nvPr>
+        </p:nvSpPr>
+        <p:spPr/>
+        <p:txBody>
+          <a:bodyPr/>
+          <a:lstStyle/>
+          <a:p>
+            <a:r>
+              <a:t>Five things.</a:t>
+            </a:r>
+          </a:p>
+          <a:p/>
+          <a:p>
+            <a:r>
+              <a:t>Generic output fails on vocabulary, shape and restraint — not usually on facts. Which is why</a:t>
+            </a:r>
+          </a:p>
+          <a:p>
+            <a:r>
+              <a:t>people dismiss the problem as cosmetic and why they're wrong to.</a:t>
+            </a:r>
+          </a:p>
+          <a:p/>
+          <a:p>
+            <a:r>
+              <a:t>A Domain Pack is a glossary, golden examples, and output conventions. Written once, reused</a:t>
+            </a:r>
+          </a:p>
+          <a:p>
+            <a:r>
+              <a:t>forever. Genuinely, keep yours.</a:t>
+            </a:r>
+          </a:p>
+          <a:p/>
+          <a:p>
+            <a:r>
+              <a:t>Professional structures exist to make specific errors visible. That's the design principle</a:t>
+            </a:r>
+          </a:p>
+          <a:p>
+            <a:r>
+              <a:t>worth carrying.</a:t>
+            </a:r>
+          </a:p>
+          <a:p/>
+          <a:p>
+            <a:r>
+              <a:t>Formatting makes output usable and more persuasive. It does not make it correct — and the gap</a:t>
+            </a:r>
+          </a:p>
+          <a:p>
+            <a:r>
+              <a:t>between those two is where professional harm happens.</a:t>
+            </a:r>
+          </a:p>
+          <a:p/>
+          <a:p>
+            <a:r>
+              <a:t>And risk varies by field. Higher stakes need more constraint and earlier review.</a:t>
+            </a:r>
+          </a:p>
+          <a:p/>
+          <a:p>
+            <a:r>
+              <a:t>Next week is the one people remember. We attack an assistant together — I've built one for the</a:t>
+            </a:r>
+          </a:p>
+          <a:p>
+            <a:r>
+              <a:t>purpose and I'd like you to break it. You'll see how little effort it takes, and then we'll fix</a:t>
+            </a:r>
+          </a:p>
+          <a:p>
+            <a:r>
+              <a:t>it, and then you'll know what to check in anything you build.</a:t>
+            </a:r>
+          </a:p>
+          <a:p/>
+          <a:p>
+            <a:r>
+              <a:t>Bring a laptop if you can. Questions?</a:t>
+            </a:r>
+          </a:p>
+        </p:txBody>
+      </p:sp>
+      <p:sp>
+        <p:nvSpPr>
+          <p:cNvPr id="4" name="Slide Number Placeholder 3"/>
+          <p:cNvSpPr>
+            <a:spLocks noGrp="1"/>
+          </p:cNvSpPr>
+          <p:nvPr>
+            <p:ph type="sldNum" idx="5" sz="quarter"/>
+          </p:nvPr>
+        </p:nvSpPr>
+        <p:spPr/>
+      </p:sp>
+    </p:spTree>
+  </p:cSld>
+  <p:clrMapOvr>
+    <a:masterClrMapping/>
+  </p:clrMapOvr>
+</p:notes>
+</file>
+
+<file path=ppt/notesSlides/notesSlide17.xml><?xml version="1.0" encoding="utf-8"?>
+<p:notes xmlns:a="http://schemas.openxmlformats.org/drawingml/2006/main" xmlns:p="http://schemas.openxmlformats.org/presentationml/2006/main" xmlns:r="http://schemas.openxmlformats.org/officeDocument/2006/relationships">
+  <p:cSld>
+    <p:spTree>
+      <p:nvGrpSpPr>
+        <p:cNvPr id="1" name=""/>
+        <p:cNvGrpSpPr/>
+        <p:nvPr/>
+      </p:nvGrpSpPr>
+      <p:grpSpPr>
+        <a:xfrm>
+          <a:off x="0" y="0"/>
+          <a:ext cx="0" cy="0"/>
+          <a:chOff x="0" y="0"/>
+          <a:chExt cx="0" cy="0"/>
+        </a:xfrm>
+      </p:grpSpPr>
+      <p:sp>
+        <p:nvSpPr>
+          <p:cNvPr id="2" name="Slide Image Placeholder 1"/>
+          <p:cNvSpPr>
+            <a:spLocks noGrp="1"/>
+          </p:cNvSpPr>
+          <p:nvPr>
+            <p:ph type="sldImg" idx="2"/>
+          </p:nvPr>
+        </p:nvSpPr>
+        <p:spPr/>
+      </p:sp>
+      <p:sp>
+        <p:nvSpPr>
+          <p:cNvPr id="3" name="Notes Placeholder 2"/>
+          <p:cNvSpPr>
+            <a:spLocks noGrp="1"/>
+          </p:cNvSpPr>
+          <p:nvPr>
+            <p:ph type="body" idx="3" sz="quarter"/>
+          </p:nvPr>
+        </p:nvSpPr>
+        <p:spPr/>
+        <p:txBody>
+          <a:bodyPr/>
+          <a:lstStyle/>
+          <a:p>
+            <a:r>
               <a:t>Take questions here.</a:t>
             </a:r>
           </a:p>
@@ -2246,101 +2557,77 @@
           <a:lstStyle/>
           <a:p>
             <a:r>
-              <a:t>Risk is not distributed evenly, and this is where the cross-disciplinary nature of this room is</a:t>
-            </a:r>
-          </a:p>
-          <a:p>
-            <a:r>
-              <a:t>genuinely useful — you get to see how differently the same tool sits in different hands.</a:t>
+              <a:t>Here's a pack written out, so you can see the shape rather than the description.</a:t>
             </a:r>
           </a:p>
           <a:p/>
           <a:p>
             <a:r>
-              <a:t>The same output quality carries very different consequences.</a:t>
+              <a:t>Glossary. Two entries, both chosen because the term means something different elsewhere. In this</a:t>
+            </a:r>
+          </a:p>
+          <a:p>
+            <a:r>
+              <a:t>department, "referral" means transfer to a named consultant — a request for advice is a</a:t>
+            </a:r>
+          </a:p>
+          <a:p>
+            <a:r>
+              <a:t>"consultation." Get that wrong and you've mislabelled the entire document. And "discharge" means</a:t>
+            </a:r>
+          </a:p>
+          <a:p>
+            <a:r>
+              <a:t>from the ward, not from the service; leaving the service is "closure."</a:t>
             </a:r>
           </a:p>
           <a:p/>
           <a:p>
             <a:r>
-              <a:t>A fabricated citation in a brainstorm: a nuisance. You notice, you move on.</a:t>
+              <a:t>Neither of those is universal. Both are locally exact. That's what a glossary entry should be.</a:t>
             </a:r>
           </a:p>
           <a:p/>
           <a:p>
             <a:r>
-              <a:t>The same fabricated citation in a filed legal document: sanctions. Real ones, imposed on real</a:t>
-            </a:r>
-          </a:p>
-          <a:p>
-            <a:r>
-              <a:t>lawyers.</a:t>
+              <a:t>Output conventions: sections in order — reason for referral, relevant history, current</a:t>
+            </a:r>
+          </a:p>
+          <a:p>
+            <a:r>
+              <a:t>medication, the specific question being asked. Maximum one page. No abbreviations except those</a:t>
+            </a:r>
+          </a:p>
+          <a:p>
+            <a:r>
+              <a:t>in the glossary, which is a nice constraint because it makes the glossary do double duty.</a:t>
             </a:r>
           </a:p>
           <a:p/>
           <a:p>
             <a:r>
-              <a:t>A fabricated drug interaction in a discharge summary: a safety incident, and potentially</a:t>
-            </a:r>
-          </a:p>
-          <a:p>
-            <a:r>
-              <a:t>someone harmed.</a:t>
+              <a:t>And the restraint statements. Never state a diagnosis. Never suggest a medication change. Never</a:t>
+            </a:r>
+          </a:p>
+          <a:p>
+            <a:r>
+              <a:t>include anything not stated in the source notes.</a:t>
             </a:r>
           </a:p>
           <a:p/>
           <a:p>
             <a:r>
-              <a:t>A wrong deadline in a student email: recoverable — unless they miss the resit, in which case it</a:t>
-            </a:r>
-          </a:p>
-          <a:p>
-            <a:r>
-              <a:t>isn't.</a:t>
-            </a:r>
-          </a:p>
-          <a:p/>
-          <a:p>
-            <a:r>
-              <a:t>Notice that the *system* is identical in all four cases. The failure rate is identical. What</a:t>
-            </a:r>
-          </a:p>
-          <a:p>
-            <a:r>
-              <a:t>differs entirely is what happens afterwards.</a:t>
-            </a:r>
-          </a:p>
-          <a:p/>
-          <a:p>
-            <a:r>
-              <a:t>So the bold line: the same system needs different handling in different hands. Higher risk means</a:t>
-            </a:r>
-          </a:p>
-          <a:p>
-            <a:r>
-              <a:t>more constraint, more quoting, earlier human review, narrower scope.</a:t>
-            </a:r>
-          </a:p>
-          <a:p/>
-          <a:p>
-            <a:r>
-              <a:t>That's why I can't give this room a single set of rules. What's proportionate for a marketing</a:t>
-            </a:r>
-          </a:p>
-          <a:p>
-            <a:r>
-              <a:t>draft is negligent for a clinical note, and what's proportionate for a clinical note would make</a:t>
-            </a:r>
-          </a:p>
-          <a:p>
-            <a:r>
-              <a:t>a marketing workflow useless.</a:t>
-            </a:r>
-          </a:p>
-          <a:p/>
-          <a:p>
-            <a:r>
-              <a:t>Calibrating that is a professional judgment, and it's yours to make in your own field.</a:t>
+              <a:t>Read those three again. That's a system prompt that keeps a referral letter within the author's</a:t>
+            </a:r>
+          </a:p>
+          <a:p>
+            <a:r>
+              <a:t>professional scope. Three sentences. And that's the part that would take a colleague years to</a:t>
+            </a:r>
+          </a:p>
+          <a:p>
+            <a:r>
+              <a:t>articulate and takes you ten minutes to write down, because you know your field.</a:t>
             </a:r>
           </a:p>
         </p:txBody>
@@ -5627,14 +5914,48 @@
       <p:grpSpPr/>
       <p:sp>
         <p:nvSpPr>
-          <p:cNvPr id="2" name="Rectangle 1"/>
+          <p:cNvPr id="2" name="TextBox 1"/>
+          <p:cNvSpPr txBox="1"/>
+          <p:nvPr/>
+        </p:nvSpPr>
+        <p:spPr>
+          <a:xfrm>
+            <a:off x="777240" y="566928"/>
+            <a:ext cx="10637215" cy="822960"/>
+          </a:xfrm>
+          <a:prstGeom prst="rect">
+            <a:avLst/>
+          </a:prstGeom>
+          <a:noFill/>
+        </p:spPr>
+        <p:txBody>
+          <a:bodyPr wrap="square" lIns="0" rIns="0" tIns="0" bIns="0">
+            <a:spAutoFit/>
+          </a:bodyPr>
+          <a:lstStyle/>
+          <a:p>
+            <a:r>
+              <a:rPr sz="3000" b="1" i="0">
+                <a:solidFill>
+                  <a:srgbClr val="1F2937"/>
+                </a:solidFill>
+                <a:latin typeface="Calibri Light"/>
+              </a:rPr>
+              <a:t>Writing the Glossary Quickly</a:t>
+            </a:r>
+          </a:p>
+        </p:txBody>
+      </p:sp>
+      <p:sp>
+        <p:nvSpPr>
+          <p:cNvPr id="3" name="Rectangle 2"/>
           <p:cNvSpPr/>
           <p:nvPr/>
         </p:nvSpPr>
         <p:spPr>
           <a:xfrm>
-            <a:off x="0" y="0"/>
-            <a:ext cx="292608" cy="6858000"/>
+            <a:off x="777240" y="1417320"/>
+            <a:ext cx="1051560" cy="38100"/>
           </a:xfrm>
           <a:prstGeom prst="rect">
             <a:avLst/>
@@ -5671,14 +5992,14 @@
       </p:sp>
       <p:sp>
         <p:nvSpPr>
-          <p:cNvPr id="3" name="TextBox 2"/>
+          <p:cNvPr id="4" name="TextBox 3"/>
           <p:cNvSpPr txBox="1"/>
           <p:nvPr/>
         </p:nvSpPr>
         <p:spPr>
           <a:xfrm>
-            <a:off x="1280160" y="2743200"/>
-            <a:ext cx="10058400" cy="457200"/>
+            <a:off x="777240" y="1783080"/>
+            <a:ext cx="10637215" cy="4343400"/>
           </a:xfrm>
           <a:prstGeom prst="rect">
             <a:avLst/>
@@ -5691,28 +6012,151 @@
           </a:bodyPr>
           <a:lstStyle/>
           <a:p>
-            <a:r>
-              <a:rPr sz="1400" b="1" i="0">
-                <a:solidFill>
-                  <a:srgbClr val="0F766E"/>
-                </a:solidFill>
-                <a:latin typeface="Calibri"/>
-              </a:rPr>
-              <a:t>PART 3</a:t>
-            </a:r>
-          </a:p>
-        </p:txBody>
-      </p:sp>
-      <p:sp>
-        <p:nvSpPr>
-          <p:cNvPr id="4" name="TextBox 3"/>
+            <a:pPr>
+              <a:lnSpc>
+                <a:spcPct val="115000"/>
+              </a:lnSpc>
+              <a:spcAft>
+                <a:spcPts val="1000"/>
+              </a:spcAft>
+            </a:pPr>
+            <a:r>
+              <a:rPr sz="1900" b="0" i="0">
+                <a:solidFill>
+                  <a:srgbClr val="1F2937"/>
+                </a:solidFill>
+                <a:latin typeface="Calibri"/>
+              </a:rPr>
+              <a:t>•  The bottleneck is recall, not writing. You know these terms; you cannot list them on demand.</a:t>
+            </a:r>
+          </a:p>
+          <a:p>
+            <a:pPr>
+              <a:lnSpc>
+                <a:spcPct val="115000"/>
+              </a:lnSpc>
+              <a:spcAft>
+                <a:spcPts val="1000"/>
+              </a:spcAft>
+            </a:pPr>
+          </a:p>
+          <a:p>
+            <a:pPr>
+              <a:lnSpc>
+                <a:spcPct val="115000"/>
+              </a:lnSpc>
+              <a:spcAft>
+                <a:spcPts val="1000"/>
+              </a:spcAft>
+            </a:pPr>
+            <a:r>
+              <a:rPr sz="1900" b="1" i="0">
+                <a:solidFill>
+                  <a:srgbClr val="1F2937"/>
+                </a:solidFill>
+                <a:latin typeface="Calibri"/>
+              </a:rPr>
+              <a:t>•  Three prompts that surface them:</a:t>
+            </a:r>
+          </a:p>
+          <a:p>
+            <a:pPr lvl="1">
+              <a:lnSpc>
+                <a:spcPct val="115000"/>
+              </a:lnSpc>
+              <a:spcAft>
+                <a:spcPts val="500"/>
+              </a:spcAft>
+            </a:pPr>
+            <a:r>
+              <a:rPr sz="1600" b="0" i="0">
+                <a:solidFill>
+                  <a:srgbClr val="333D4B"/>
+                </a:solidFill>
+                <a:latin typeface="Calibri"/>
+              </a:rPr>
+              <a:t>—  What did I have to explain to the last new colleague who joined?</a:t>
+            </a:r>
+          </a:p>
+          <a:p>
+            <a:pPr lvl="1">
+              <a:lnSpc>
+                <a:spcPct val="115000"/>
+              </a:lnSpc>
+              <a:spcAft>
+                <a:spcPts val="500"/>
+              </a:spcAft>
+            </a:pPr>
+            <a:r>
+              <a:rPr sz="1600" b="0" i="0">
+                <a:solidFill>
+                  <a:srgbClr val="333D4B"/>
+                </a:solidFill>
+                <a:latin typeface="Calibri"/>
+              </a:rPr>
+              <a:t>—  What has someone from another department misunderstood in the last year?</a:t>
+            </a:r>
+          </a:p>
+          <a:p>
+            <a:pPr lvl="1">
+              <a:lnSpc>
+                <a:spcPct val="115000"/>
+              </a:lnSpc>
+              <a:spcAft>
+                <a:spcPts val="500"/>
+              </a:spcAft>
+            </a:pPr>
+            <a:r>
+              <a:rPr sz="1600" b="0" i="0">
+                <a:solidFill>
+                  <a:srgbClr val="333D4B"/>
+                </a:solidFill>
+                <a:latin typeface="Calibri"/>
+              </a:rPr>
+              <a:t>—  Which words would mean something different in a textbook than they mean here?</a:t>
+            </a:r>
+          </a:p>
+          <a:p>
+            <a:pPr>
+              <a:lnSpc>
+                <a:spcPct val="115000"/>
+              </a:lnSpc>
+              <a:spcAft>
+                <a:spcPts val="1000"/>
+              </a:spcAft>
+            </a:pPr>
+          </a:p>
+          <a:p>
+            <a:pPr lvl="1">
+              <a:lnSpc>
+                <a:spcPct val="115000"/>
+              </a:lnSpc>
+              <a:spcAft>
+                <a:spcPts val="500"/>
+              </a:spcAft>
+            </a:pPr>
+            <a:r>
+              <a:rPr sz="1600" b="0" i="0">
+                <a:solidFill>
+                  <a:srgbClr val="333D4B"/>
+                </a:solidFill>
+                <a:latin typeface="Calibri"/>
+              </a:rPr>
+              <a:t>—  Ten terms is enough to start. The pack improves every time something goes wrong.</a:t>
+            </a:r>
+          </a:p>
+        </p:txBody>
+      </p:sp>
+      <p:sp>
+        <p:nvSpPr>
+          <p:cNvPr id="5" name="TextBox 4"/>
           <p:cNvSpPr txBox="1"/>
           <p:nvPr/>
         </p:nvSpPr>
         <p:spPr>
           <a:xfrm>
-            <a:off x="1280160" y="3200400"/>
-            <a:ext cx="10058400" cy="1097280"/>
+            <a:off x="777240" y="6355080"/>
+            <a:ext cx="10637215" cy="274320"/>
           </a:xfrm>
           <a:prstGeom prst="rect">
             <a:avLst/>
@@ -5726,13 +6170,48 @@
           <a:lstStyle/>
           <a:p>
             <a:r>
-              <a:rPr sz="3400" b="1" i="0">
-                <a:solidFill>
-                  <a:srgbClr val="1F2937"/>
-                </a:solidFill>
-                <a:latin typeface="Calibri Light"/>
-              </a:rPr>
-              <a:t>Build</a:t>
+              <a:rPr sz="1000" b="0" i="0">
+                <a:solidFill>
+                  <a:srgbClr val="6B7787"/>
+                </a:solidFill>
+                <a:latin typeface="Calibri"/>
+              </a:rPr>
+              <a:t>Week 11  ·  Prompt Engineering and Large Language Models</a:t>
+            </a:r>
+          </a:p>
+        </p:txBody>
+      </p:sp>
+      <p:sp>
+        <p:nvSpPr>
+          <p:cNvPr id="6" name="TextBox 5"/>
+          <p:cNvSpPr txBox="1"/>
+          <p:nvPr/>
+        </p:nvSpPr>
+        <p:spPr>
+          <a:xfrm>
+            <a:off x="10500055" y="6355080"/>
+            <a:ext cx="914400" cy="274320"/>
+          </a:xfrm>
+          <a:prstGeom prst="rect">
+            <a:avLst/>
+          </a:prstGeom>
+          <a:noFill/>
+        </p:spPr>
+        <p:txBody>
+          <a:bodyPr wrap="square" lIns="0" rIns="0" tIns="0" bIns="0">
+            <a:spAutoFit/>
+          </a:bodyPr>
+          <a:lstStyle/>
+          <a:p>
+            <a:pPr algn="r"/>
+            <a:r>
+              <a:rPr sz="1000" b="0" i="0">
+                <a:solidFill>
+                  <a:srgbClr val="6B7787"/>
+                </a:solidFill>
+                <a:latin typeface="Calibri"/>
+              </a:rPr>
+              <a:t>10</a:t>
             </a:r>
           </a:p>
         </p:txBody>
@@ -5764,7 +6243,7 @@
         <p:spPr>
           <a:xfrm>
             <a:off x="777240" y="566928"/>
-            <a:ext cx="10637215" cy="365760"/>
+            <a:ext cx="10637215" cy="822960"/>
           </a:xfrm>
           <a:prstGeom prst="rect">
             <a:avLst/>
@@ -5778,67 +6257,33 @@
           <a:lstStyle/>
           <a:p>
             <a:r>
-              <a:rPr sz="1300" b="1" i="0">
-                <a:solidFill>
-                  <a:srgbClr val="B45309"/>
-                </a:solidFill>
-                <a:latin typeface="Calibri"/>
-              </a:rPr>
-              <a:t>IN-CLASS ACTIVITY  ·  20 MINUTES</a:t>
-            </a:r>
-          </a:p>
-        </p:txBody>
-      </p:sp>
-      <p:sp>
-        <p:nvSpPr>
-          <p:cNvPr id="3" name="TextBox 2"/>
-          <p:cNvSpPr txBox="1"/>
-          <p:nvPr/>
-        </p:nvSpPr>
-        <p:spPr>
-          <a:xfrm>
-            <a:off x="777240" y="960120"/>
-            <a:ext cx="10637215" cy="731520"/>
-          </a:xfrm>
-          <a:prstGeom prst="rect">
-            <a:avLst/>
-          </a:prstGeom>
-          <a:noFill/>
-        </p:spPr>
-        <p:txBody>
-          <a:bodyPr wrap="square" lIns="0" rIns="0" tIns="0" bIns="0">
-            <a:spAutoFit/>
-          </a:bodyPr>
-          <a:lstStyle/>
-          <a:p>
-            <a:r>
               <a:rPr sz="3000" b="1" i="0">
                 <a:solidFill>
                   <a:srgbClr val="1F2937"/>
                 </a:solidFill>
                 <a:latin typeface="Calibri Light"/>
               </a:rPr>
-              <a:t>Build Your Domain Pack</a:t>
-            </a:r>
-          </a:p>
-        </p:txBody>
-      </p:sp>
-      <p:sp>
-        <p:nvSpPr>
-          <p:cNvPr id="4" name="Rectangle 3"/>
+              <a:t>Risk Is Not Distributed Evenly</a:t>
+            </a:r>
+          </a:p>
+        </p:txBody>
+      </p:sp>
+      <p:sp>
+        <p:nvSpPr>
+          <p:cNvPr id="3" name="Rectangle 2"/>
           <p:cNvSpPr/>
           <p:nvPr/>
         </p:nvSpPr>
         <p:spPr>
           <a:xfrm>
-            <a:off x="777240" y="1783080"/>
+            <a:off x="777240" y="1417320"/>
             <a:ext cx="1051560" cy="38100"/>
           </a:xfrm>
           <a:prstGeom prst="rect">
             <a:avLst/>
           </a:prstGeom>
           <a:solidFill>
-            <a:srgbClr val="B45309"/>
+            <a:srgbClr val="0F766E"/>
           </a:solidFill>
           <a:ln>
             <a:noFill/>
@@ -5869,14 +6314,14 @@
       </p:sp>
       <p:sp>
         <p:nvSpPr>
-          <p:cNvPr id="5" name="TextBox 4"/>
+          <p:cNvPr id="4" name="TextBox 3"/>
           <p:cNvSpPr txBox="1"/>
           <p:nvPr/>
         </p:nvSpPr>
         <p:spPr>
           <a:xfrm>
-            <a:off x="777240" y="2148840"/>
-            <a:ext cx="10637215" cy="3931920"/>
+            <a:off x="777240" y="1783080"/>
+            <a:ext cx="10637215" cy="4343400"/>
           </a:xfrm>
           <a:prstGeom prst="rect">
             <a:avLst/>
@@ -5898,14 +6343,24 @@
               </a:spcAft>
             </a:pPr>
             <a:r>
-              <a:rPr sz="1900" b="1" i="0">
+              <a:rPr sz="1900" b="0" i="0">
                 <a:solidFill>
                   <a:srgbClr val="1F2937"/>
                 </a:solidFill>
                 <a:latin typeface="Calibri"/>
               </a:rPr>
-              <a:t>•  1.  Glossary — ten terms minimum.</a:t>
-            </a:r>
+              <a:t>•  The same output quality carries very different consequences by field</a:t>
+            </a:r>
+          </a:p>
+          <a:p>
+            <a:pPr>
+              <a:lnSpc>
+                <a:spcPct val="115000"/>
+              </a:lnSpc>
+              <a:spcAft>
+                <a:spcPts val="1000"/>
+              </a:spcAft>
+            </a:pPr>
           </a:p>
           <a:p>
             <a:pPr lvl="1">
@@ -5923,7 +6378,64 @@
                 </a:solidFill>
                 <a:latin typeface="Calibri"/>
               </a:rPr>
-              <a:t>—  Prioritise terms that mean something different outside your institution.</a:t>
+              <a:t>—  A fabricated citation in a brainstorm: a nuisance</a:t>
+            </a:r>
+          </a:p>
+          <a:p>
+            <a:pPr lvl="1">
+              <a:lnSpc>
+                <a:spcPct val="115000"/>
+              </a:lnSpc>
+              <a:spcAft>
+                <a:spcPts val="500"/>
+              </a:spcAft>
+            </a:pPr>
+            <a:r>
+              <a:rPr sz="1600" b="0" i="0">
+                <a:solidFill>
+                  <a:srgbClr val="333D4B"/>
+                </a:solidFill>
+                <a:latin typeface="Calibri"/>
+              </a:rPr>
+              <a:t>—  A fabricated citation in a filed legal document: sanctions</a:t>
+            </a:r>
+          </a:p>
+          <a:p>
+            <a:pPr lvl="1">
+              <a:lnSpc>
+                <a:spcPct val="115000"/>
+              </a:lnSpc>
+              <a:spcAft>
+                <a:spcPts val="500"/>
+              </a:spcAft>
+            </a:pPr>
+            <a:r>
+              <a:rPr sz="1600" b="0" i="0">
+                <a:solidFill>
+                  <a:srgbClr val="333D4B"/>
+                </a:solidFill>
+                <a:latin typeface="Calibri"/>
+              </a:rPr>
+              <a:t>—  A fabricated drug interaction in a discharge summary: a safety incident</a:t>
+            </a:r>
+          </a:p>
+          <a:p>
+            <a:pPr lvl="1">
+              <a:lnSpc>
+                <a:spcPct val="115000"/>
+              </a:lnSpc>
+              <a:spcAft>
+                <a:spcPts val="500"/>
+              </a:spcAft>
+            </a:pPr>
+            <a:r>
+              <a:rPr sz="1600" b="0" i="0">
+                <a:solidFill>
+                  <a:srgbClr val="333D4B"/>
+                </a:solidFill>
+                <a:latin typeface="Calibri"/>
+              </a:rPr>
+              <a:t>—  A wrong deadline in a student email: recoverable, unless they miss the resit</a:t>
             </a:r>
           </a:p>
           <a:p>
@@ -5935,6 +6447,16 @@
                 <a:spcPts val="1000"/>
               </a:spcAft>
             </a:pPr>
+          </a:p>
+          <a:p>
+            <a:pPr>
+              <a:lnSpc>
+                <a:spcPct val="115000"/>
+              </a:lnSpc>
+              <a:spcAft>
+                <a:spcPts val="1000"/>
+              </a:spcAft>
+            </a:pPr>
             <a:r>
               <a:rPr sz="1900" b="1" i="0">
                 <a:solidFill>
@@ -5942,7 +6464,7 @@
                 </a:solidFill>
                 <a:latin typeface="Calibri"/>
               </a:rPr>
-              <a:t>•  2.  One golden example.</a:t>
+              <a:t>•  So the same system needs different handling in different hands:</a:t>
             </a:r>
           </a:p>
           <a:p>
@@ -5961,90 +6483,14 @@
                 </a:solidFill>
                 <a:latin typeface="Calibri"/>
               </a:rPr>
-              <a:t>—  A real, approved, anonymised output from your field. Anonymise properly — no names, dates or identifiers.</a:t>
-            </a:r>
-          </a:p>
-          <a:p>
-            <a:pPr>
-              <a:lnSpc>
-                <a:spcPct val="115000"/>
-              </a:lnSpc>
-              <a:spcAft>
-                <a:spcPts val="1000"/>
-              </a:spcAft>
-            </a:pPr>
-            <a:r>
-              <a:rPr sz="1900" b="1" i="0">
-                <a:solidFill>
-                  <a:srgbClr val="1F2937"/>
-                </a:solidFill>
-                <a:latin typeface="Calibri"/>
-              </a:rPr>
-              <a:t>•  3.  Output conventions — sections in order, plus the restraint.</a:t>
-            </a:r>
-          </a:p>
-          <a:p>
-            <a:pPr lvl="1">
-              <a:lnSpc>
-                <a:spcPct val="115000"/>
-              </a:lnSpc>
-              <a:spcAft>
-                <a:spcPts val="500"/>
-              </a:spcAft>
-            </a:pPr>
-            <a:r>
-              <a:rPr sz="1600" b="0" i="0">
-                <a:solidFill>
-                  <a:srgbClr val="333D4B"/>
-                </a:solidFill>
-                <a:latin typeface="Calibri"/>
-              </a:rPr>
-              <a:t>—  "Never state a diagnosis." "Never cite a case." "Never predict an individual student's result."</a:t>
-            </a:r>
-          </a:p>
-          <a:p>
-            <a:pPr>
-              <a:lnSpc>
-                <a:spcPct val="115000"/>
-              </a:lnSpc>
-              <a:spcAft>
-                <a:spcPts val="1000"/>
-              </a:spcAft>
-            </a:pPr>
-            <a:r>
-              <a:rPr sz="1900" b="1" i="0">
-                <a:solidFill>
-                  <a:srgbClr val="1F2937"/>
-                </a:solidFill>
-                <a:latin typeface="Calibri"/>
-              </a:rPr>
-              <a:t>•  4.  Add it to your Week 10 design and run one test.</a:t>
-            </a:r>
-          </a:p>
-          <a:p>
-            <a:pPr lvl="1">
-              <a:lnSpc>
-                <a:spcPct val="115000"/>
-              </a:lnSpc>
-              <a:spcAft>
-                <a:spcPts val="500"/>
-              </a:spcAft>
-            </a:pPr>
-            <a:r>
-              <a:rPr sz="1600" b="0" i="0">
-                <a:solidFill>
-                  <a:srgbClr val="333D4B"/>
-                </a:solidFill>
-                <a:latin typeface="Calibri"/>
-              </a:rPr>
-              <a:t>—  Compare the output with and without the pack.</a:t>
-            </a:r>
-          </a:p>
-        </p:txBody>
-      </p:sp>
-      <p:sp>
-        <p:nvSpPr>
-          <p:cNvPr id="6" name="TextBox 5"/>
+              <a:t>—  Higher risk → more constraint, more quoting, earlier human review, narrower scope</a:t>
+            </a:r>
+          </a:p>
+        </p:txBody>
+      </p:sp>
+      <p:sp>
+        <p:nvSpPr>
+          <p:cNvPr id="5" name="TextBox 4"/>
           <p:cNvSpPr txBox="1"/>
           <p:nvPr/>
         </p:nvSpPr>
@@ -6078,7 +6524,7 @@
       </p:sp>
       <p:sp>
         <p:nvSpPr>
-          <p:cNvPr id="7" name="TextBox 6"/>
+          <p:cNvPr id="6" name="TextBox 5"/>
           <p:cNvSpPr txBox="1"/>
           <p:nvPr/>
         </p:nvSpPr>
@@ -6131,48 +6577,14 @@
       <p:grpSpPr/>
       <p:sp>
         <p:nvSpPr>
-          <p:cNvPr id="2" name="TextBox 1"/>
-          <p:cNvSpPr txBox="1"/>
-          <p:nvPr/>
-        </p:nvSpPr>
-        <p:spPr>
-          <a:xfrm>
-            <a:off x="777240" y="566928"/>
-            <a:ext cx="10637215" cy="822960"/>
-          </a:xfrm>
-          <a:prstGeom prst="rect">
-            <a:avLst/>
-          </a:prstGeom>
-          <a:noFill/>
-        </p:spPr>
-        <p:txBody>
-          <a:bodyPr wrap="square" lIns="0" rIns="0" tIns="0" bIns="0">
-            <a:spAutoFit/>
-          </a:bodyPr>
-          <a:lstStyle/>
-          <a:p>
-            <a:r>
-              <a:rPr sz="3000" b="1" i="0">
-                <a:solidFill>
-                  <a:srgbClr val="1F2937"/>
-                </a:solidFill>
-                <a:latin typeface="Calibri Light"/>
-              </a:rPr>
-              <a:t>What the Pack Changes — and What It Does Not</a:t>
-            </a:r>
-          </a:p>
-        </p:txBody>
-      </p:sp>
-      <p:sp>
-        <p:nvSpPr>
-          <p:cNvPr id="3" name="Rectangle 2"/>
+          <p:cNvPr id="2" name="Rectangle 1"/>
           <p:cNvSpPr/>
           <p:nvPr/>
         </p:nvSpPr>
         <p:spPr>
           <a:xfrm>
-            <a:off x="777240" y="1417320"/>
-            <a:ext cx="1051560" cy="38100"/>
+            <a:off x="0" y="0"/>
+            <a:ext cx="292608" cy="6858000"/>
           </a:xfrm>
           <a:prstGeom prst="rect">
             <a:avLst/>
@@ -6209,14 +6621,14 @@
       </p:sp>
       <p:sp>
         <p:nvSpPr>
-          <p:cNvPr id="4" name="TextBox 3"/>
+          <p:cNvPr id="3" name="TextBox 2"/>
           <p:cNvSpPr txBox="1"/>
           <p:nvPr/>
         </p:nvSpPr>
         <p:spPr>
           <a:xfrm>
-            <a:off x="777240" y="1783080"/>
-            <a:ext cx="10637215" cy="4343400"/>
+            <a:off x="1280160" y="2743200"/>
+            <a:ext cx="10058400" cy="457200"/>
           </a:xfrm>
           <a:prstGeom prst="rect">
             <a:avLst/>
@@ -6229,170 +6641,28 @@
           </a:bodyPr>
           <a:lstStyle/>
           <a:p>
-            <a:pPr>
-              <a:lnSpc>
-                <a:spcPct val="115000"/>
-              </a:lnSpc>
-              <a:spcAft>
-                <a:spcPts val="1000"/>
-              </a:spcAft>
-            </a:pPr>
-            <a:r>
-              <a:rPr sz="1900" b="1" i="0">
-                <a:solidFill>
-                  <a:srgbClr val="1F2937"/>
-                </a:solidFill>
-                <a:latin typeface="Calibri"/>
-              </a:rPr>
-              <a:t>•  What it changes:</a:t>
-            </a:r>
-          </a:p>
-          <a:p>
-            <a:pPr lvl="1">
-              <a:lnSpc>
-                <a:spcPct val="115000"/>
-              </a:lnSpc>
-              <a:spcAft>
-                <a:spcPts val="500"/>
-              </a:spcAft>
-            </a:pPr>
-            <a:r>
-              <a:rPr sz="1600" b="0" i="0">
-                <a:solidFill>
-                  <a:srgbClr val="333D4B"/>
-                </a:solidFill>
-                <a:latin typeface="Calibri"/>
-              </a:rPr>
-              <a:t>—  Vocabulary becomes local. Structure becomes recognisable. Restraint appears where it was absent.</a:t>
-            </a:r>
-          </a:p>
-          <a:p>
-            <a:pPr lvl="1">
-              <a:lnSpc>
-                <a:spcPct val="115000"/>
-              </a:lnSpc>
-              <a:spcAft>
-                <a:spcPts val="500"/>
-              </a:spcAft>
-            </a:pPr>
-            <a:r>
-              <a:rPr sz="1600" b="0" i="0">
-                <a:solidFill>
-                  <a:srgbClr val="333D4B"/>
-                </a:solidFill>
-                <a:latin typeface="Calibri"/>
-              </a:rPr>
-              <a:t>—  Output stops looking like the internet and starts looking like your institution</a:t>
-            </a:r>
-          </a:p>
-          <a:p>
-            <a:pPr>
-              <a:lnSpc>
-                <a:spcPct val="115000"/>
-              </a:lnSpc>
-              <a:spcAft>
-                <a:spcPts val="1000"/>
-              </a:spcAft>
-            </a:pPr>
-          </a:p>
-          <a:p>
-            <a:pPr>
-              <a:lnSpc>
-                <a:spcPct val="115000"/>
-              </a:lnSpc>
-              <a:spcAft>
-                <a:spcPts val="1000"/>
-              </a:spcAft>
-            </a:pPr>
-            <a:r>
-              <a:rPr sz="1900" b="1" i="0">
-                <a:solidFill>
-                  <a:srgbClr val="1F2937"/>
-                </a:solidFill>
-                <a:latin typeface="Calibri"/>
-              </a:rPr>
-              <a:t>•  What it does not change:</a:t>
-            </a:r>
-          </a:p>
-          <a:p>
-            <a:pPr lvl="1">
-              <a:lnSpc>
-                <a:spcPct val="115000"/>
-              </a:lnSpc>
-              <a:spcAft>
-                <a:spcPts val="500"/>
-              </a:spcAft>
-            </a:pPr>
-            <a:r>
-              <a:rPr sz="1600" b="0" i="0">
-                <a:solidFill>
-                  <a:srgbClr val="333D4B"/>
-                </a:solidFill>
-                <a:latin typeface="Calibri"/>
-              </a:rPr>
-              <a:t>—  Accuracy. A well-formatted SOAP note can contain a fabricated finding.</a:t>
-            </a:r>
-          </a:p>
-          <a:p>
-            <a:pPr lvl="1">
-              <a:lnSpc>
-                <a:spcPct val="115000"/>
-              </a:lnSpc>
-              <a:spcAft>
-                <a:spcPts val="500"/>
-              </a:spcAft>
-            </a:pPr>
-            <a:r>
-              <a:rPr sz="1600" b="0" i="0">
-                <a:solidFill>
-                  <a:srgbClr val="333D4B"/>
-                </a:solidFill>
-                <a:latin typeface="Calibri"/>
-              </a:rPr>
-              <a:t>—  If anything, professional formatting makes wrong content more persuasive, not less</a:t>
-            </a:r>
-          </a:p>
-          <a:p>
-            <a:pPr>
-              <a:lnSpc>
-                <a:spcPct val="115000"/>
-              </a:lnSpc>
-              <a:spcAft>
-                <a:spcPts val="1000"/>
-              </a:spcAft>
-            </a:pPr>
-          </a:p>
-          <a:p>
-            <a:pPr>
-              <a:lnSpc>
-                <a:spcPct val="115000"/>
-              </a:lnSpc>
-              <a:spcAft>
-                <a:spcPts val="1000"/>
-              </a:spcAft>
-            </a:pPr>
-            <a:r>
-              <a:rPr sz="1900" b="1" i="0">
-                <a:solidFill>
-                  <a:srgbClr val="1F2937"/>
-                </a:solidFill>
-                <a:latin typeface="Calibri"/>
-              </a:rPr>
-              <a:t>•  A Domain Pack makes output usable. Grounding and testing make it trustworthy. You need all three.</a:t>
-            </a:r>
-          </a:p>
-        </p:txBody>
-      </p:sp>
-      <p:sp>
-        <p:nvSpPr>
-          <p:cNvPr id="5" name="TextBox 4"/>
+            <a:r>
+              <a:rPr sz="1400" b="1" i="0">
+                <a:solidFill>
+                  <a:srgbClr val="0F766E"/>
+                </a:solidFill>
+                <a:latin typeface="Calibri"/>
+              </a:rPr>
+              <a:t>PART 3</a:t>
+            </a:r>
+          </a:p>
+        </p:txBody>
+      </p:sp>
+      <p:sp>
+        <p:nvSpPr>
+          <p:cNvPr id="4" name="TextBox 3"/>
           <p:cNvSpPr txBox="1"/>
           <p:nvPr/>
         </p:nvSpPr>
         <p:spPr>
           <a:xfrm>
-            <a:off x="777240" y="6355080"/>
-            <a:ext cx="10637215" cy="274320"/>
+            <a:off x="1280160" y="3200400"/>
+            <a:ext cx="10058400" cy="1097280"/>
           </a:xfrm>
           <a:prstGeom prst="rect">
             <a:avLst/>
@@ -6406,48 +6676,13 @@
           <a:lstStyle/>
           <a:p>
             <a:r>
-              <a:rPr sz="1000" b="0" i="0">
-                <a:solidFill>
-                  <a:srgbClr val="6B7787"/>
-                </a:solidFill>
-                <a:latin typeface="Calibri"/>
-              </a:rPr>
-              <a:t>Week 11  ·  Prompt Engineering and Large Language Models</a:t>
-            </a:r>
-          </a:p>
-        </p:txBody>
-      </p:sp>
-      <p:sp>
-        <p:nvSpPr>
-          <p:cNvPr id="6" name="TextBox 5"/>
-          <p:cNvSpPr txBox="1"/>
-          <p:nvPr/>
-        </p:nvSpPr>
-        <p:spPr>
-          <a:xfrm>
-            <a:off x="10500055" y="6355080"/>
-            <a:ext cx="914400" cy="274320"/>
-          </a:xfrm>
-          <a:prstGeom prst="rect">
-            <a:avLst/>
-          </a:prstGeom>
-          <a:noFill/>
-        </p:spPr>
-        <p:txBody>
-          <a:bodyPr wrap="square" lIns="0" rIns="0" tIns="0" bIns="0">
-            <a:spAutoFit/>
-          </a:bodyPr>
-          <a:lstStyle/>
-          <a:p>
-            <a:pPr algn="r"/>
-            <a:r>
-              <a:rPr sz="1000" b="0" i="0">
-                <a:solidFill>
-                  <a:srgbClr val="6B7787"/>
-                </a:solidFill>
-                <a:latin typeface="Calibri"/>
-              </a:rPr>
-              <a:t>12</a:t>
+              <a:rPr sz="3400" b="1" i="0">
+                <a:solidFill>
+                  <a:srgbClr val="1F2937"/>
+                </a:solidFill>
+                <a:latin typeface="Calibri Light"/>
+              </a:rPr>
+              <a:t>Build</a:t>
             </a:r>
           </a:p>
         </p:txBody>
@@ -6479,7 +6714,7 @@
         <p:spPr>
           <a:xfrm>
             <a:off x="777240" y="566928"/>
-            <a:ext cx="10637215" cy="822960"/>
+            <a:ext cx="10637215" cy="365760"/>
           </a:xfrm>
           <a:prstGeom prst="rect">
             <a:avLst/>
@@ -6493,33 +6728,67 @@
           <a:lstStyle/>
           <a:p>
             <a:r>
+              <a:rPr sz="1300" b="1" i="0">
+                <a:solidFill>
+                  <a:srgbClr val="B45309"/>
+                </a:solidFill>
+                <a:latin typeface="Calibri"/>
+              </a:rPr>
+              <a:t>IN-CLASS ACTIVITY  ·  20 MINUTES</a:t>
+            </a:r>
+          </a:p>
+        </p:txBody>
+      </p:sp>
+      <p:sp>
+        <p:nvSpPr>
+          <p:cNvPr id="3" name="TextBox 2"/>
+          <p:cNvSpPr txBox="1"/>
+          <p:nvPr/>
+        </p:nvSpPr>
+        <p:spPr>
+          <a:xfrm>
+            <a:off x="777240" y="960120"/>
+            <a:ext cx="10637215" cy="731520"/>
+          </a:xfrm>
+          <a:prstGeom prst="rect">
+            <a:avLst/>
+          </a:prstGeom>
+          <a:noFill/>
+        </p:spPr>
+        <p:txBody>
+          <a:bodyPr wrap="square" lIns="0" rIns="0" tIns="0" bIns="0">
+            <a:spAutoFit/>
+          </a:bodyPr>
+          <a:lstStyle/>
+          <a:p>
+            <a:r>
               <a:rPr sz="3000" b="1" i="0">
                 <a:solidFill>
                   <a:srgbClr val="1F2937"/>
                 </a:solidFill>
                 <a:latin typeface="Calibri Light"/>
               </a:rPr>
-              <a:t>Concepts You Must Be Able to Define and Diagnose</a:t>
-            </a:r>
-          </a:p>
-        </p:txBody>
-      </p:sp>
-      <p:sp>
-        <p:nvSpPr>
-          <p:cNvPr id="3" name="Rectangle 2"/>
+              <a:t>Build Your Domain Pack</a:t>
+            </a:r>
+          </a:p>
+        </p:txBody>
+      </p:sp>
+      <p:sp>
+        <p:nvSpPr>
+          <p:cNvPr id="4" name="Rectangle 3"/>
           <p:cNvSpPr/>
           <p:nvPr/>
         </p:nvSpPr>
         <p:spPr>
           <a:xfrm>
-            <a:off x="777240" y="1417320"/>
+            <a:off x="777240" y="1783080"/>
             <a:ext cx="1051560" cy="38100"/>
           </a:xfrm>
           <a:prstGeom prst="rect">
             <a:avLst/>
           </a:prstGeom>
           <a:solidFill>
-            <a:srgbClr val="0F766E"/>
+            <a:srgbClr val="B45309"/>
           </a:solidFill>
           <a:ln>
             <a:noFill/>
@@ -6550,58 +6819,14 @@
       </p:sp>
       <p:sp>
         <p:nvSpPr>
-          <p:cNvPr id="4" name="Rectangle 3"/>
-          <p:cNvSpPr/>
-          <p:nvPr/>
-        </p:nvSpPr>
-        <p:spPr>
-          <a:xfrm>
-            <a:off x="777240" y="1783080"/>
-            <a:ext cx="10637215" cy="4251960"/>
-          </a:xfrm>
-          <a:prstGeom prst="rect">
-            <a:avLst/>
-          </a:prstGeom>
-          <a:solidFill>
-            <a:srgbClr val="F1F5F9"/>
-          </a:solidFill>
-          <a:ln>
-            <a:noFill/>
-          </a:ln>
-          <a:effectLst/>
-        </p:spPr>
-        <p:style>
-          <a:lnRef idx="1">
-            <a:schemeClr val="accent1"/>
-          </a:lnRef>
-          <a:fillRef idx="3">
-            <a:schemeClr val="accent1"/>
-          </a:fillRef>
-          <a:effectRef idx="2">
-            <a:schemeClr val="accent1"/>
-          </a:effectRef>
-          <a:fontRef idx="minor">
-            <a:schemeClr val="lt1"/>
-          </a:fontRef>
-        </p:style>
-        <p:txBody>
-          <a:bodyPr rtlCol="0" anchor="ctr"/>
-          <a:lstStyle/>
-          <a:p>
-            <a:pPr algn="ctr"/>
-          </a:p>
-        </p:txBody>
-      </p:sp>
-      <p:sp>
-        <p:nvSpPr>
           <p:cNvPr id="5" name="TextBox 4"/>
           <p:cNvSpPr txBox="1"/>
           <p:nvPr/>
         </p:nvSpPr>
         <p:spPr>
           <a:xfrm>
-            <a:off x="1188720" y="2103120"/>
-            <a:ext cx="9814255" cy="3611880"/>
+            <a:off x="777240" y="2148840"/>
+            <a:ext cx="10637215" cy="3931920"/>
           </a:xfrm>
           <a:prstGeom prst="rect">
             <a:avLst/>
@@ -6629,7 +6854,7 @@
                 </a:solidFill>
                 <a:latin typeface="Calibri"/>
               </a:rPr>
-              <a:t>•  The Domain Pack</a:t>
+              <a:t>•  1.  Glossary — ten terms minimum.</a:t>
             </a:r>
           </a:p>
           <a:p>
@@ -6648,7 +6873,7 @@
                 </a:solidFill>
                 <a:latin typeface="Calibri"/>
               </a:rPr>
-              <a:t>—  Glossary of locally-defined terms · golden examples including an edge case · output conventions including what must never appear.</a:t>
+              <a:t>—  Prioritise terms that mean something different outside your institution.</a:t>
             </a:r>
           </a:p>
           <a:p>
@@ -6667,7 +6892,7 @@
                 </a:solidFill>
                 <a:latin typeface="Calibri"/>
               </a:rPr>
-              <a:t>•  Why professional structures exist</a:t>
+              <a:t>•  2.  One golden example.</a:t>
             </a:r>
           </a:p>
           <a:p>
@@ -6686,7 +6911,7 @@
                 </a:solidFill>
                 <a:latin typeface="Calibri"/>
               </a:rPr>
-              <a:t>—  Each makes a particular error visible — SOAP separates report from measurement; IRAC states the rule before applying it.</a:t>
+              <a:t>—  A real, approved, anonymised output from your field. Anonymise properly — no names, dates or identifiers.</a:t>
             </a:r>
           </a:p>
           <a:p>
@@ -6705,7 +6930,7 @@
                 </a:solidFill>
                 <a:latin typeface="Calibri"/>
               </a:rPr>
-              <a:t>•  Three gaps in generic output</a:t>
+              <a:t>•  3.  Output conventions — sections in order, plus the restraint.</a:t>
             </a:r>
           </a:p>
           <a:p>
@@ -6724,7 +6949,7 @@
                 </a:solidFill>
                 <a:latin typeface="Calibri"/>
               </a:rPr>
-              <a:t>—  Local vocabulary · expected shape · conventional restraint.</a:t>
+              <a:t>—  "Never state a diagnosis." "Never cite a case." "Never predict an individual student's result."</a:t>
             </a:r>
           </a:p>
           <a:p>
@@ -6743,7 +6968,7 @@
                 </a:solidFill>
                 <a:latin typeface="Calibri"/>
               </a:rPr>
-              <a:t>•  Risk varies by field, not by system</a:t>
+              <a:t>•  4.  Add it to your Week 10 design and run one test.</a:t>
             </a:r>
           </a:p>
           <a:p>
@@ -6762,45 +6987,7 @@
                 </a:solidFill>
                 <a:latin typeface="Calibri"/>
               </a:rPr>
-              <a:t>—  Identical output carries different consequences. Higher risk demands more constraint, more quoting, earlier review.</a:t>
-            </a:r>
-          </a:p>
-          <a:p>
-            <a:pPr>
-              <a:lnSpc>
-                <a:spcPct val="115000"/>
-              </a:lnSpc>
-              <a:spcAft>
-                <a:spcPts val="1000"/>
-              </a:spcAft>
-            </a:pPr>
-            <a:r>
-              <a:rPr sz="1900" b="1" i="0">
-                <a:solidFill>
-                  <a:srgbClr val="1F2937"/>
-                </a:solidFill>
-                <a:latin typeface="Calibri"/>
-              </a:rPr>
-              <a:t>•  Formatting is not accuracy</a:t>
-            </a:r>
-          </a:p>
-          <a:p>
-            <a:pPr lvl="1">
-              <a:lnSpc>
-                <a:spcPct val="115000"/>
-              </a:lnSpc>
-              <a:spcAft>
-                <a:spcPts val="500"/>
-              </a:spcAft>
-            </a:pPr>
-            <a:r>
-              <a:rPr sz="1600" b="0" i="0">
-                <a:solidFill>
-                  <a:srgbClr val="333D4B"/>
-                </a:solidFill>
-                <a:latin typeface="Calibri"/>
-              </a:rPr>
-              <a:t>—  A Domain Pack makes output usable and more persuasive. It does nothing for correctness — and may increase over-trust.</a:t>
+              <a:t>—  Compare the output with and without the pack.</a:t>
             </a:r>
           </a:p>
         </p:txBody>
@@ -6921,7 +7108,7 @@
                 </a:solidFill>
                 <a:latin typeface="Calibri Light"/>
               </a:rPr>
-              <a:t>Wrap-Up</a:t>
+              <a:t>What the Pack Changes — and What It Does Not</a:t>
             </a:r>
           </a:p>
         </p:txBody>
@@ -7001,13 +7188,51 @@
               </a:spcAft>
             </a:pPr>
             <a:r>
-              <a:rPr sz="1900" b="0" i="0">
+              <a:rPr sz="1900" b="1" i="0">
                 <a:solidFill>
                   <a:srgbClr val="1F2937"/>
                 </a:solidFill>
                 <a:latin typeface="Calibri"/>
               </a:rPr>
-              <a:t>•  Generic output fails on vocabulary, shape and restraint — not usually on facts</a:t>
+              <a:t>•  What it changes:</a:t>
+            </a:r>
+          </a:p>
+          <a:p>
+            <a:pPr lvl="1">
+              <a:lnSpc>
+                <a:spcPct val="115000"/>
+              </a:lnSpc>
+              <a:spcAft>
+                <a:spcPts val="500"/>
+              </a:spcAft>
+            </a:pPr>
+            <a:r>
+              <a:rPr sz="1600" b="0" i="0">
+                <a:solidFill>
+                  <a:srgbClr val="333D4B"/>
+                </a:solidFill>
+                <a:latin typeface="Calibri"/>
+              </a:rPr>
+              <a:t>—  Vocabulary becomes local. Structure becomes recognisable. Restraint appears where it was absent.</a:t>
+            </a:r>
+          </a:p>
+          <a:p>
+            <a:pPr lvl="1">
+              <a:lnSpc>
+                <a:spcPct val="115000"/>
+              </a:lnSpc>
+              <a:spcAft>
+                <a:spcPts val="500"/>
+              </a:spcAft>
+            </a:pPr>
+            <a:r>
+              <a:rPr sz="1600" b="0" i="0">
+                <a:solidFill>
+                  <a:srgbClr val="333D4B"/>
+                </a:solidFill>
+                <a:latin typeface="Calibri"/>
+              </a:rPr>
+              <a:t>—  Output stops looking like the internet and starts looking like your institution</a:t>
             </a:r>
           </a:p>
           <a:p>
@@ -7019,15 +7244,6 @@
                 <a:spcPts val="1000"/>
               </a:spcAft>
             </a:pPr>
-            <a:r>
-              <a:rPr sz="1900" b="0" i="0">
-                <a:solidFill>
-                  <a:srgbClr val="1F2937"/>
-                </a:solidFill>
-                <a:latin typeface="Calibri"/>
-              </a:rPr>
-              <a:t>•  A Domain Pack is a glossary, golden examples, and output conventions. Written once, reused forever.</a:t>
-            </a:r>
           </a:p>
           <a:p>
             <a:pPr>
@@ -7039,13 +7255,51 @@
               </a:spcAft>
             </a:pPr>
             <a:r>
-              <a:rPr sz="1900" b="0" i="0">
+              <a:rPr sz="1900" b="1" i="0">
                 <a:solidFill>
                   <a:srgbClr val="1F2937"/>
                 </a:solidFill>
                 <a:latin typeface="Calibri"/>
               </a:rPr>
-              <a:t>•  Professional structures exist to make specific errors visible</a:t>
+              <a:t>•  What it does not change:</a:t>
+            </a:r>
+          </a:p>
+          <a:p>
+            <a:pPr lvl="1">
+              <a:lnSpc>
+                <a:spcPct val="115000"/>
+              </a:lnSpc>
+              <a:spcAft>
+                <a:spcPts val="500"/>
+              </a:spcAft>
+            </a:pPr>
+            <a:r>
+              <a:rPr sz="1600" b="0" i="0">
+                <a:solidFill>
+                  <a:srgbClr val="333D4B"/>
+                </a:solidFill>
+                <a:latin typeface="Calibri"/>
+              </a:rPr>
+              <a:t>—  Accuracy. A well-formatted SOAP note can contain a fabricated finding.</a:t>
+            </a:r>
+          </a:p>
+          <a:p>
+            <a:pPr lvl="1">
+              <a:lnSpc>
+                <a:spcPct val="115000"/>
+              </a:lnSpc>
+              <a:spcAft>
+                <a:spcPts val="500"/>
+              </a:spcAft>
+            </a:pPr>
+            <a:r>
+              <a:rPr sz="1600" b="0" i="0">
+                <a:solidFill>
+                  <a:srgbClr val="333D4B"/>
+                </a:solidFill>
+                <a:latin typeface="Calibri"/>
+              </a:rPr>
+              <a:t>—  If anything, professional formatting makes wrong content more persuasive, not less</a:t>
             </a:r>
           </a:p>
           <a:p>
@@ -7057,15 +7311,6 @@
                 <a:spcPts val="1000"/>
               </a:spcAft>
             </a:pPr>
-            <a:r>
-              <a:rPr sz="1900" b="1" i="0">
-                <a:solidFill>
-                  <a:srgbClr val="1F2937"/>
-                </a:solidFill>
-                <a:latin typeface="Calibri"/>
-              </a:rPr>
-              <a:t>•  Formatting makes output usable and more persuasive. It does not make it correct.</a:t>
-            </a:r>
           </a:p>
           <a:p>
             <a:pPr>
@@ -7077,61 +7322,13 @@
               </a:spcAft>
             </a:pPr>
             <a:r>
-              <a:rPr sz="1900" b="0" i="0">
+              <a:rPr sz="1900" b="1" i="0">
                 <a:solidFill>
                   <a:srgbClr val="1F2937"/>
                 </a:solidFill>
                 <a:latin typeface="Calibri"/>
               </a:rPr>
-              <a:t>•  Risk varies by field: higher stakes need more constraint and earlier review</a:t>
-            </a:r>
-          </a:p>
-          <a:p>
-            <a:pPr>
-              <a:lnSpc>
-                <a:spcPct val="115000"/>
-              </a:lnSpc>
-              <a:spcAft>
-                <a:spcPts val="1000"/>
-              </a:spcAft>
-            </a:pPr>
-          </a:p>
-          <a:p>
-            <a:pPr>
-              <a:lnSpc>
-                <a:spcPct val="115000"/>
-              </a:lnSpc>
-              <a:spcAft>
-                <a:spcPts val="1000"/>
-              </a:spcAft>
-            </a:pPr>
-            <a:r>
-              <a:rPr sz="1900" b="1" i="0">
-                <a:solidFill>
-                  <a:srgbClr val="1F2937"/>
-                </a:solidFill>
-                <a:latin typeface="Calibri"/>
-              </a:rPr>
-              <a:t>•  Next week:</a:t>
-            </a:r>
-          </a:p>
-          <a:p>
-            <a:pPr lvl="1">
-              <a:lnSpc>
-                <a:spcPct val="115000"/>
-              </a:lnSpc>
-              <a:spcAft>
-                <a:spcPts val="500"/>
-              </a:spcAft>
-            </a:pPr>
-            <a:r>
-              <a:rPr sz="1600" b="0" i="0">
-                <a:solidFill>
-                  <a:srgbClr val="333D4B"/>
-                </a:solidFill>
-                <a:latin typeface="Calibri"/>
-              </a:rPr>
-              <a:t>—  Prompt Injection and AI Security — we attack an assistant together and see how easy it is</a:t>
+              <a:t>•  A Domain Pack makes output usable. Grounding and testing make it trustworthy. You need all three.</a:t>
             </a:r>
           </a:p>
         </p:txBody>
@@ -7225,6 +7422,759 @@
       <p:grpSpPr/>
       <p:sp>
         <p:nvSpPr>
+          <p:cNvPr id="2" name="TextBox 1"/>
+          <p:cNvSpPr txBox="1"/>
+          <p:nvPr/>
+        </p:nvSpPr>
+        <p:spPr>
+          <a:xfrm>
+            <a:off x="777240" y="566928"/>
+            <a:ext cx="10637215" cy="822960"/>
+          </a:xfrm>
+          <a:prstGeom prst="rect">
+            <a:avLst/>
+          </a:prstGeom>
+          <a:noFill/>
+        </p:spPr>
+        <p:txBody>
+          <a:bodyPr wrap="square" lIns="0" rIns="0" tIns="0" bIns="0">
+            <a:spAutoFit/>
+          </a:bodyPr>
+          <a:lstStyle/>
+          <a:p>
+            <a:r>
+              <a:rPr sz="3000" b="1" i="0">
+                <a:solidFill>
+                  <a:srgbClr val="1F2937"/>
+                </a:solidFill>
+                <a:latin typeface="Calibri Light"/>
+              </a:rPr>
+              <a:t>Concepts You Must Be Able to Define and Diagnose</a:t>
+            </a:r>
+          </a:p>
+        </p:txBody>
+      </p:sp>
+      <p:sp>
+        <p:nvSpPr>
+          <p:cNvPr id="3" name="Rectangle 2"/>
+          <p:cNvSpPr/>
+          <p:nvPr/>
+        </p:nvSpPr>
+        <p:spPr>
+          <a:xfrm>
+            <a:off x="777240" y="1417320"/>
+            <a:ext cx="1051560" cy="38100"/>
+          </a:xfrm>
+          <a:prstGeom prst="rect">
+            <a:avLst/>
+          </a:prstGeom>
+          <a:solidFill>
+            <a:srgbClr val="0F766E"/>
+          </a:solidFill>
+          <a:ln>
+            <a:noFill/>
+          </a:ln>
+          <a:effectLst/>
+        </p:spPr>
+        <p:style>
+          <a:lnRef idx="1">
+            <a:schemeClr val="accent1"/>
+          </a:lnRef>
+          <a:fillRef idx="3">
+            <a:schemeClr val="accent1"/>
+          </a:fillRef>
+          <a:effectRef idx="2">
+            <a:schemeClr val="accent1"/>
+          </a:effectRef>
+          <a:fontRef idx="minor">
+            <a:schemeClr val="lt1"/>
+          </a:fontRef>
+        </p:style>
+        <p:txBody>
+          <a:bodyPr rtlCol="0" anchor="ctr"/>
+          <a:lstStyle/>
+          <a:p>
+            <a:pPr algn="ctr"/>
+          </a:p>
+        </p:txBody>
+      </p:sp>
+      <p:sp>
+        <p:nvSpPr>
+          <p:cNvPr id="4" name="Rectangle 3"/>
+          <p:cNvSpPr/>
+          <p:nvPr/>
+        </p:nvSpPr>
+        <p:spPr>
+          <a:xfrm>
+            <a:off x="777240" y="1783080"/>
+            <a:ext cx="10637215" cy="4251960"/>
+          </a:xfrm>
+          <a:prstGeom prst="rect">
+            <a:avLst/>
+          </a:prstGeom>
+          <a:solidFill>
+            <a:srgbClr val="F1F5F9"/>
+          </a:solidFill>
+          <a:ln>
+            <a:noFill/>
+          </a:ln>
+          <a:effectLst/>
+        </p:spPr>
+        <p:style>
+          <a:lnRef idx="1">
+            <a:schemeClr val="accent1"/>
+          </a:lnRef>
+          <a:fillRef idx="3">
+            <a:schemeClr val="accent1"/>
+          </a:fillRef>
+          <a:effectRef idx="2">
+            <a:schemeClr val="accent1"/>
+          </a:effectRef>
+          <a:fontRef idx="minor">
+            <a:schemeClr val="lt1"/>
+          </a:fontRef>
+        </p:style>
+        <p:txBody>
+          <a:bodyPr rtlCol="0" anchor="ctr"/>
+          <a:lstStyle/>
+          <a:p>
+            <a:pPr algn="ctr"/>
+          </a:p>
+        </p:txBody>
+      </p:sp>
+      <p:sp>
+        <p:nvSpPr>
+          <p:cNvPr id="5" name="TextBox 4"/>
+          <p:cNvSpPr txBox="1"/>
+          <p:nvPr/>
+        </p:nvSpPr>
+        <p:spPr>
+          <a:xfrm>
+            <a:off x="1188720" y="2103120"/>
+            <a:ext cx="9814255" cy="3611880"/>
+          </a:xfrm>
+          <a:prstGeom prst="rect">
+            <a:avLst/>
+          </a:prstGeom>
+          <a:noFill/>
+        </p:spPr>
+        <p:txBody>
+          <a:bodyPr wrap="square" lIns="0" rIns="0" tIns="0" bIns="0">
+            <a:spAutoFit/>
+          </a:bodyPr>
+          <a:lstStyle/>
+          <a:p>
+            <a:pPr>
+              <a:lnSpc>
+                <a:spcPct val="115000"/>
+              </a:lnSpc>
+              <a:spcAft>
+                <a:spcPts val="1000"/>
+              </a:spcAft>
+            </a:pPr>
+            <a:r>
+              <a:rPr sz="1900" b="1" i="0">
+                <a:solidFill>
+                  <a:srgbClr val="1F2937"/>
+                </a:solidFill>
+                <a:latin typeface="Calibri"/>
+              </a:rPr>
+              <a:t>•  The Domain Pack</a:t>
+            </a:r>
+          </a:p>
+          <a:p>
+            <a:pPr lvl="1">
+              <a:lnSpc>
+                <a:spcPct val="115000"/>
+              </a:lnSpc>
+              <a:spcAft>
+                <a:spcPts val="500"/>
+              </a:spcAft>
+            </a:pPr>
+            <a:r>
+              <a:rPr sz="1600" b="0" i="0">
+                <a:solidFill>
+                  <a:srgbClr val="333D4B"/>
+                </a:solidFill>
+                <a:latin typeface="Calibri"/>
+              </a:rPr>
+              <a:t>—  Glossary of locally-defined terms · golden examples including an edge case · output conventions including what must never appear.</a:t>
+            </a:r>
+          </a:p>
+          <a:p>
+            <a:pPr>
+              <a:lnSpc>
+                <a:spcPct val="115000"/>
+              </a:lnSpc>
+              <a:spcAft>
+                <a:spcPts val="1000"/>
+              </a:spcAft>
+            </a:pPr>
+            <a:r>
+              <a:rPr sz="1900" b="1" i="0">
+                <a:solidFill>
+                  <a:srgbClr val="1F2937"/>
+                </a:solidFill>
+                <a:latin typeface="Calibri"/>
+              </a:rPr>
+              <a:t>•  Why professional structures exist</a:t>
+            </a:r>
+          </a:p>
+          <a:p>
+            <a:pPr lvl="1">
+              <a:lnSpc>
+                <a:spcPct val="115000"/>
+              </a:lnSpc>
+              <a:spcAft>
+                <a:spcPts val="500"/>
+              </a:spcAft>
+            </a:pPr>
+            <a:r>
+              <a:rPr sz="1600" b="0" i="0">
+                <a:solidFill>
+                  <a:srgbClr val="333D4B"/>
+                </a:solidFill>
+                <a:latin typeface="Calibri"/>
+              </a:rPr>
+              <a:t>—  Each makes a particular error visible — SOAP separates report from measurement; IRAC states the rule before applying it.</a:t>
+            </a:r>
+          </a:p>
+          <a:p>
+            <a:pPr>
+              <a:lnSpc>
+                <a:spcPct val="115000"/>
+              </a:lnSpc>
+              <a:spcAft>
+                <a:spcPts val="1000"/>
+              </a:spcAft>
+            </a:pPr>
+            <a:r>
+              <a:rPr sz="1900" b="1" i="0">
+                <a:solidFill>
+                  <a:srgbClr val="1F2937"/>
+                </a:solidFill>
+                <a:latin typeface="Calibri"/>
+              </a:rPr>
+              <a:t>•  Three gaps in generic output</a:t>
+            </a:r>
+          </a:p>
+          <a:p>
+            <a:pPr lvl="1">
+              <a:lnSpc>
+                <a:spcPct val="115000"/>
+              </a:lnSpc>
+              <a:spcAft>
+                <a:spcPts val="500"/>
+              </a:spcAft>
+            </a:pPr>
+            <a:r>
+              <a:rPr sz="1600" b="0" i="0">
+                <a:solidFill>
+                  <a:srgbClr val="333D4B"/>
+                </a:solidFill>
+                <a:latin typeface="Calibri"/>
+              </a:rPr>
+              <a:t>—  Local vocabulary · expected shape · conventional restraint.</a:t>
+            </a:r>
+          </a:p>
+          <a:p>
+            <a:pPr>
+              <a:lnSpc>
+                <a:spcPct val="115000"/>
+              </a:lnSpc>
+              <a:spcAft>
+                <a:spcPts val="1000"/>
+              </a:spcAft>
+            </a:pPr>
+            <a:r>
+              <a:rPr sz="1900" b="1" i="0">
+                <a:solidFill>
+                  <a:srgbClr val="1F2937"/>
+                </a:solidFill>
+                <a:latin typeface="Calibri"/>
+              </a:rPr>
+              <a:t>•  Risk varies by field, not by system</a:t>
+            </a:r>
+          </a:p>
+          <a:p>
+            <a:pPr lvl="1">
+              <a:lnSpc>
+                <a:spcPct val="115000"/>
+              </a:lnSpc>
+              <a:spcAft>
+                <a:spcPts val="500"/>
+              </a:spcAft>
+            </a:pPr>
+            <a:r>
+              <a:rPr sz="1600" b="0" i="0">
+                <a:solidFill>
+                  <a:srgbClr val="333D4B"/>
+                </a:solidFill>
+                <a:latin typeface="Calibri"/>
+              </a:rPr>
+              <a:t>—  Identical output carries different consequences. Higher risk demands more constraint, more quoting, earlier review.</a:t>
+            </a:r>
+          </a:p>
+          <a:p>
+            <a:pPr>
+              <a:lnSpc>
+                <a:spcPct val="115000"/>
+              </a:lnSpc>
+              <a:spcAft>
+                <a:spcPts val="1000"/>
+              </a:spcAft>
+            </a:pPr>
+            <a:r>
+              <a:rPr sz="1900" b="1" i="0">
+                <a:solidFill>
+                  <a:srgbClr val="1F2937"/>
+                </a:solidFill>
+                <a:latin typeface="Calibri"/>
+              </a:rPr>
+              <a:t>•  Formatting is not accuracy</a:t>
+            </a:r>
+          </a:p>
+          <a:p>
+            <a:pPr lvl="1">
+              <a:lnSpc>
+                <a:spcPct val="115000"/>
+              </a:lnSpc>
+              <a:spcAft>
+                <a:spcPts val="500"/>
+              </a:spcAft>
+            </a:pPr>
+            <a:r>
+              <a:rPr sz="1600" b="0" i="0">
+                <a:solidFill>
+                  <a:srgbClr val="333D4B"/>
+                </a:solidFill>
+                <a:latin typeface="Calibri"/>
+              </a:rPr>
+              <a:t>—  A Domain Pack makes output usable and more persuasive. It does nothing for correctness — and may increase over-trust.</a:t>
+            </a:r>
+          </a:p>
+        </p:txBody>
+      </p:sp>
+      <p:sp>
+        <p:nvSpPr>
+          <p:cNvPr id="6" name="TextBox 5"/>
+          <p:cNvSpPr txBox="1"/>
+          <p:nvPr/>
+        </p:nvSpPr>
+        <p:spPr>
+          <a:xfrm>
+            <a:off x="777240" y="6355080"/>
+            <a:ext cx="10637215" cy="274320"/>
+          </a:xfrm>
+          <a:prstGeom prst="rect">
+            <a:avLst/>
+          </a:prstGeom>
+          <a:noFill/>
+        </p:spPr>
+        <p:txBody>
+          <a:bodyPr wrap="square" lIns="0" rIns="0" tIns="0" bIns="0">
+            <a:spAutoFit/>
+          </a:bodyPr>
+          <a:lstStyle/>
+          <a:p>
+            <a:r>
+              <a:rPr sz="1000" b="0" i="0">
+                <a:solidFill>
+                  <a:srgbClr val="6B7787"/>
+                </a:solidFill>
+                <a:latin typeface="Calibri"/>
+              </a:rPr>
+              <a:t>Week 11  ·  Prompt Engineering and Large Language Models</a:t>
+            </a:r>
+          </a:p>
+        </p:txBody>
+      </p:sp>
+      <p:sp>
+        <p:nvSpPr>
+          <p:cNvPr id="7" name="TextBox 6"/>
+          <p:cNvSpPr txBox="1"/>
+          <p:nvPr/>
+        </p:nvSpPr>
+        <p:spPr>
+          <a:xfrm>
+            <a:off x="10500055" y="6355080"/>
+            <a:ext cx="914400" cy="274320"/>
+          </a:xfrm>
+          <a:prstGeom prst="rect">
+            <a:avLst/>
+          </a:prstGeom>
+          <a:noFill/>
+        </p:spPr>
+        <p:txBody>
+          <a:bodyPr wrap="square" lIns="0" rIns="0" tIns="0" bIns="0">
+            <a:spAutoFit/>
+          </a:bodyPr>
+          <a:lstStyle/>
+          <a:p>
+            <a:pPr algn="r"/>
+            <a:r>
+              <a:rPr sz="1000" b="0" i="0">
+                <a:solidFill>
+                  <a:srgbClr val="6B7787"/>
+                </a:solidFill>
+                <a:latin typeface="Calibri"/>
+              </a:rPr>
+              <a:t>15</a:t>
+            </a:r>
+          </a:p>
+        </p:txBody>
+      </p:sp>
+    </p:spTree>
+  </p:cSld>
+  <p:clrMapOvr>
+    <a:masterClrMapping/>
+  </p:clrMapOvr>
+</p:sld>
+</file>
+
+<file path=ppt/slides/slide16.xml><?xml version="1.0" encoding="utf-8"?>
+<p:sld xmlns:a="http://schemas.openxmlformats.org/drawingml/2006/main" xmlns:p="http://schemas.openxmlformats.org/presentationml/2006/main" xmlns:r="http://schemas.openxmlformats.org/officeDocument/2006/relationships">
+  <p:cSld>
+    <p:spTree>
+      <p:nvGrpSpPr>
+        <p:cNvPr id="1" name=""/>
+        <p:cNvGrpSpPr/>
+        <p:nvPr/>
+      </p:nvGrpSpPr>
+      <p:grpSpPr/>
+      <p:sp>
+        <p:nvSpPr>
+          <p:cNvPr id="2" name="TextBox 1"/>
+          <p:cNvSpPr txBox="1"/>
+          <p:nvPr/>
+        </p:nvSpPr>
+        <p:spPr>
+          <a:xfrm>
+            <a:off x="777240" y="566928"/>
+            <a:ext cx="10637215" cy="822960"/>
+          </a:xfrm>
+          <a:prstGeom prst="rect">
+            <a:avLst/>
+          </a:prstGeom>
+          <a:noFill/>
+        </p:spPr>
+        <p:txBody>
+          <a:bodyPr wrap="square" lIns="0" rIns="0" tIns="0" bIns="0">
+            <a:spAutoFit/>
+          </a:bodyPr>
+          <a:lstStyle/>
+          <a:p>
+            <a:r>
+              <a:rPr sz="3000" b="1" i="0">
+                <a:solidFill>
+                  <a:srgbClr val="1F2937"/>
+                </a:solidFill>
+                <a:latin typeface="Calibri Light"/>
+              </a:rPr>
+              <a:t>Wrap-Up</a:t>
+            </a:r>
+          </a:p>
+        </p:txBody>
+      </p:sp>
+      <p:sp>
+        <p:nvSpPr>
+          <p:cNvPr id="3" name="Rectangle 2"/>
+          <p:cNvSpPr/>
+          <p:nvPr/>
+        </p:nvSpPr>
+        <p:spPr>
+          <a:xfrm>
+            <a:off x="777240" y="1417320"/>
+            <a:ext cx="1051560" cy="38100"/>
+          </a:xfrm>
+          <a:prstGeom prst="rect">
+            <a:avLst/>
+          </a:prstGeom>
+          <a:solidFill>
+            <a:srgbClr val="0F766E"/>
+          </a:solidFill>
+          <a:ln>
+            <a:noFill/>
+          </a:ln>
+          <a:effectLst/>
+        </p:spPr>
+        <p:style>
+          <a:lnRef idx="1">
+            <a:schemeClr val="accent1"/>
+          </a:lnRef>
+          <a:fillRef idx="3">
+            <a:schemeClr val="accent1"/>
+          </a:fillRef>
+          <a:effectRef idx="2">
+            <a:schemeClr val="accent1"/>
+          </a:effectRef>
+          <a:fontRef idx="minor">
+            <a:schemeClr val="lt1"/>
+          </a:fontRef>
+        </p:style>
+        <p:txBody>
+          <a:bodyPr rtlCol="0" anchor="ctr"/>
+          <a:lstStyle/>
+          <a:p>
+            <a:pPr algn="ctr"/>
+          </a:p>
+        </p:txBody>
+      </p:sp>
+      <p:sp>
+        <p:nvSpPr>
+          <p:cNvPr id="4" name="TextBox 3"/>
+          <p:cNvSpPr txBox="1"/>
+          <p:nvPr/>
+        </p:nvSpPr>
+        <p:spPr>
+          <a:xfrm>
+            <a:off x="777240" y="1783080"/>
+            <a:ext cx="10637215" cy="4343400"/>
+          </a:xfrm>
+          <a:prstGeom prst="rect">
+            <a:avLst/>
+          </a:prstGeom>
+          <a:noFill/>
+        </p:spPr>
+        <p:txBody>
+          <a:bodyPr wrap="square" lIns="0" rIns="0" tIns="0" bIns="0">
+            <a:spAutoFit/>
+          </a:bodyPr>
+          <a:lstStyle/>
+          <a:p>
+            <a:pPr>
+              <a:lnSpc>
+                <a:spcPct val="115000"/>
+              </a:lnSpc>
+              <a:spcAft>
+                <a:spcPts val="1000"/>
+              </a:spcAft>
+            </a:pPr>
+            <a:r>
+              <a:rPr sz="1900" b="0" i="0">
+                <a:solidFill>
+                  <a:srgbClr val="1F2937"/>
+                </a:solidFill>
+                <a:latin typeface="Calibri"/>
+              </a:rPr>
+              <a:t>•  Generic output fails on vocabulary, shape and restraint — not usually on facts</a:t>
+            </a:r>
+          </a:p>
+          <a:p>
+            <a:pPr>
+              <a:lnSpc>
+                <a:spcPct val="115000"/>
+              </a:lnSpc>
+              <a:spcAft>
+                <a:spcPts val="1000"/>
+              </a:spcAft>
+            </a:pPr>
+            <a:r>
+              <a:rPr sz="1900" b="0" i="0">
+                <a:solidFill>
+                  <a:srgbClr val="1F2937"/>
+                </a:solidFill>
+                <a:latin typeface="Calibri"/>
+              </a:rPr>
+              <a:t>•  A Domain Pack is a glossary, golden examples, and output conventions. Written once, reused forever.</a:t>
+            </a:r>
+          </a:p>
+          <a:p>
+            <a:pPr>
+              <a:lnSpc>
+                <a:spcPct val="115000"/>
+              </a:lnSpc>
+              <a:spcAft>
+                <a:spcPts val="1000"/>
+              </a:spcAft>
+            </a:pPr>
+            <a:r>
+              <a:rPr sz="1900" b="0" i="0">
+                <a:solidFill>
+                  <a:srgbClr val="1F2937"/>
+                </a:solidFill>
+                <a:latin typeface="Calibri"/>
+              </a:rPr>
+              <a:t>•  Professional structures exist to make specific errors visible</a:t>
+            </a:r>
+          </a:p>
+          <a:p>
+            <a:pPr>
+              <a:lnSpc>
+                <a:spcPct val="115000"/>
+              </a:lnSpc>
+              <a:spcAft>
+                <a:spcPts val="1000"/>
+              </a:spcAft>
+            </a:pPr>
+            <a:r>
+              <a:rPr sz="1900" b="1" i="0">
+                <a:solidFill>
+                  <a:srgbClr val="1F2937"/>
+                </a:solidFill>
+                <a:latin typeface="Calibri"/>
+              </a:rPr>
+              <a:t>•  Formatting makes output usable and more persuasive. It does not make it correct.</a:t>
+            </a:r>
+          </a:p>
+          <a:p>
+            <a:pPr>
+              <a:lnSpc>
+                <a:spcPct val="115000"/>
+              </a:lnSpc>
+              <a:spcAft>
+                <a:spcPts val="1000"/>
+              </a:spcAft>
+            </a:pPr>
+            <a:r>
+              <a:rPr sz="1900" b="0" i="0">
+                <a:solidFill>
+                  <a:srgbClr val="1F2937"/>
+                </a:solidFill>
+                <a:latin typeface="Calibri"/>
+              </a:rPr>
+              <a:t>•  Risk varies by field: higher stakes need more constraint and earlier review</a:t>
+            </a:r>
+          </a:p>
+          <a:p>
+            <a:pPr>
+              <a:lnSpc>
+                <a:spcPct val="115000"/>
+              </a:lnSpc>
+              <a:spcAft>
+                <a:spcPts val="1000"/>
+              </a:spcAft>
+            </a:pPr>
+          </a:p>
+          <a:p>
+            <a:pPr>
+              <a:lnSpc>
+                <a:spcPct val="115000"/>
+              </a:lnSpc>
+              <a:spcAft>
+                <a:spcPts val="1000"/>
+              </a:spcAft>
+            </a:pPr>
+            <a:r>
+              <a:rPr sz="1900" b="1" i="0">
+                <a:solidFill>
+                  <a:srgbClr val="1F2937"/>
+                </a:solidFill>
+                <a:latin typeface="Calibri"/>
+              </a:rPr>
+              <a:t>•  Next week:</a:t>
+            </a:r>
+          </a:p>
+          <a:p>
+            <a:pPr lvl="1">
+              <a:lnSpc>
+                <a:spcPct val="115000"/>
+              </a:lnSpc>
+              <a:spcAft>
+                <a:spcPts val="500"/>
+              </a:spcAft>
+            </a:pPr>
+            <a:r>
+              <a:rPr sz="1600" b="0" i="0">
+                <a:solidFill>
+                  <a:srgbClr val="333D4B"/>
+                </a:solidFill>
+                <a:latin typeface="Calibri"/>
+              </a:rPr>
+              <a:t>—  Prompt Injection and AI Security — we attack an assistant together and see how easy it is</a:t>
+            </a:r>
+          </a:p>
+        </p:txBody>
+      </p:sp>
+      <p:sp>
+        <p:nvSpPr>
+          <p:cNvPr id="5" name="TextBox 4"/>
+          <p:cNvSpPr txBox="1"/>
+          <p:nvPr/>
+        </p:nvSpPr>
+        <p:spPr>
+          <a:xfrm>
+            <a:off x="777240" y="6355080"/>
+            <a:ext cx="10637215" cy="274320"/>
+          </a:xfrm>
+          <a:prstGeom prst="rect">
+            <a:avLst/>
+          </a:prstGeom>
+          <a:noFill/>
+        </p:spPr>
+        <p:txBody>
+          <a:bodyPr wrap="square" lIns="0" rIns="0" tIns="0" bIns="0">
+            <a:spAutoFit/>
+          </a:bodyPr>
+          <a:lstStyle/>
+          <a:p>
+            <a:r>
+              <a:rPr sz="1000" b="0" i="0">
+                <a:solidFill>
+                  <a:srgbClr val="6B7787"/>
+                </a:solidFill>
+                <a:latin typeface="Calibri"/>
+              </a:rPr>
+              <a:t>Week 11  ·  Prompt Engineering and Large Language Models</a:t>
+            </a:r>
+          </a:p>
+        </p:txBody>
+      </p:sp>
+      <p:sp>
+        <p:nvSpPr>
+          <p:cNvPr id="6" name="TextBox 5"/>
+          <p:cNvSpPr txBox="1"/>
+          <p:nvPr/>
+        </p:nvSpPr>
+        <p:spPr>
+          <a:xfrm>
+            <a:off x="10500055" y="6355080"/>
+            <a:ext cx="914400" cy="274320"/>
+          </a:xfrm>
+          <a:prstGeom prst="rect">
+            <a:avLst/>
+          </a:prstGeom>
+          <a:noFill/>
+        </p:spPr>
+        <p:txBody>
+          <a:bodyPr wrap="square" lIns="0" rIns="0" tIns="0" bIns="0">
+            <a:spAutoFit/>
+          </a:bodyPr>
+          <a:lstStyle/>
+          <a:p>
+            <a:pPr algn="r"/>
+            <a:r>
+              <a:rPr sz="1000" b="0" i="0">
+                <a:solidFill>
+                  <a:srgbClr val="6B7787"/>
+                </a:solidFill>
+                <a:latin typeface="Calibri"/>
+              </a:rPr>
+              <a:t>16</a:t>
+            </a:r>
+          </a:p>
+        </p:txBody>
+      </p:sp>
+    </p:spTree>
+  </p:cSld>
+  <p:clrMapOvr>
+    <a:masterClrMapping/>
+  </p:clrMapOvr>
+</p:sld>
+</file>
+
+<file path=ppt/slides/slide17.xml><?xml version="1.0" encoding="utf-8"?>
+<p:sld xmlns:a="http://schemas.openxmlformats.org/drawingml/2006/main" xmlns:p="http://schemas.openxmlformats.org/presentationml/2006/main" xmlns:r="http://schemas.openxmlformats.org/officeDocument/2006/relationships">
+  <p:cSld>
+    <p:spTree>
+      <p:nvGrpSpPr>
+        <p:cNvPr id="1" name=""/>
+        <p:cNvGrpSpPr/>
+        <p:nvPr/>
+      </p:nvGrpSpPr>
+      <p:grpSpPr/>
+      <p:sp>
+        <p:nvSpPr>
           <p:cNvPr id="2" name="Rectangle 1"/>
           <p:cNvSpPr/>
           <p:nvPr/>
@@ -9657,7 +10607,7 @@
                 </a:solidFill>
                 <a:latin typeface="Calibri Light"/>
               </a:rPr>
-              <a:t>Risk Is Not Distributed Evenly</a:t>
+              <a:t>A Domain Pack, Written Out</a:t>
             </a:r>
           </a:p>
         </p:txBody>
@@ -9737,13 +10687,51 @@
               </a:spcAft>
             </a:pPr>
             <a:r>
-              <a:rPr sz="1900" b="0" i="0">
+              <a:rPr sz="1900" b="1" i="0">
                 <a:solidFill>
                   <a:srgbClr val="1F2937"/>
                 </a:solidFill>
                 <a:latin typeface="Calibri"/>
               </a:rPr>
-              <a:t>•  The same output quality carries very different consequences by field</a:t>
+              <a:t>•  Glossary (extract)</a:t>
+            </a:r>
+          </a:p>
+          <a:p>
+            <a:pPr lvl="1">
+              <a:lnSpc>
+                <a:spcPct val="115000"/>
+              </a:lnSpc>
+              <a:spcAft>
+                <a:spcPts val="500"/>
+              </a:spcAft>
+            </a:pPr>
+            <a:r>
+              <a:rPr sz="1600" b="0" i="0">
+                <a:solidFill>
+                  <a:srgbClr val="333D4B"/>
+                </a:solidFill>
+                <a:latin typeface="Calibri"/>
+              </a:rPr>
+              <a:t>—  "Referral" = transfer to a named consultant, not a request for advice. Advice requests are "consultations".</a:t>
+            </a:r>
+          </a:p>
+          <a:p>
+            <a:pPr lvl="1">
+              <a:lnSpc>
+                <a:spcPct val="115000"/>
+              </a:lnSpc>
+              <a:spcAft>
+                <a:spcPts val="500"/>
+              </a:spcAft>
+            </a:pPr>
+            <a:r>
+              <a:rPr sz="1600" b="0" i="0">
+                <a:solidFill>
+                  <a:srgbClr val="333D4B"/>
+                </a:solidFill>
+                <a:latin typeface="Calibri"/>
+              </a:rPr>
+              <a:t>—  "Discharge" = discharge from the ward, not from the service. Discharge from the service is "closure".</a:t>
             </a:r>
           </a:p>
           <a:p>
@@ -9755,6 +10743,15 @@
                 <a:spcPts val="1000"/>
               </a:spcAft>
             </a:pPr>
+            <a:r>
+              <a:rPr sz="1900" b="1" i="0">
+                <a:solidFill>
+                  <a:srgbClr val="1F2937"/>
+                </a:solidFill>
+                <a:latin typeface="Calibri"/>
+              </a:rPr>
+              <a:t>•  Output conventions</a:t>
+            </a:r>
           </a:p>
           <a:p>
             <a:pPr lvl="1">
@@ -9772,7 +10769,7 @@
                 </a:solidFill>
                 <a:latin typeface="Calibri"/>
               </a:rPr>
-              <a:t>—  A fabricated citation in a brainstorm: a nuisance</a:t>
+              <a:t>—  Sections in order: reason for referral · relevant history · current medication · specific question asked.</a:t>
             </a:r>
           </a:p>
           <a:p>
@@ -9791,7 +10788,26 @@
                 </a:solidFill>
                 <a:latin typeface="Calibri"/>
               </a:rPr>
-              <a:t>—  A fabricated citation in a filed legal document: sanctions</a:t>
+              <a:t>—  Maximum one page. No abbreviations except those in the glossary.</a:t>
+            </a:r>
+          </a:p>
+          <a:p>
+            <a:pPr>
+              <a:lnSpc>
+                <a:spcPct val="115000"/>
+              </a:lnSpc>
+              <a:spcAft>
+                <a:spcPts val="1000"/>
+              </a:spcAft>
+            </a:pPr>
+            <a:r>
+              <a:rPr sz="1900" b="1" i="0">
+                <a:solidFill>
+                  <a:srgbClr val="1F2937"/>
+                </a:solidFill>
+                <a:latin typeface="Calibri"/>
+              </a:rPr>
+              <a:t>•  Restraint — the "never" statements</a:t>
             </a:r>
           </a:p>
           <a:p>
@@ -9810,74 +10826,7 @@
                 </a:solidFill>
                 <a:latin typeface="Calibri"/>
               </a:rPr>
-              <a:t>—  A fabricated drug interaction in a discharge summary: a safety incident</a:t>
-            </a:r>
-          </a:p>
-          <a:p>
-            <a:pPr lvl="1">
-              <a:lnSpc>
-                <a:spcPct val="115000"/>
-              </a:lnSpc>
-              <a:spcAft>
-                <a:spcPts val="500"/>
-              </a:spcAft>
-            </a:pPr>
-            <a:r>
-              <a:rPr sz="1600" b="0" i="0">
-                <a:solidFill>
-                  <a:srgbClr val="333D4B"/>
-                </a:solidFill>
-                <a:latin typeface="Calibri"/>
-              </a:rPr>
-              <a:t>—  A wrong deadline in a student email: recoverable, unless they miss the resit</a:t>
-            </a:r>
-          </a:p>
-          <a:p>
-            <a:pPr>
-              <a:lnSpc>
-                <a:spcPct val="115000"/>
-              </a:lnSpc>
-              <a:spcAft>
-                <a:spcPts val="1000"/>
-              </a:spcAft>
-            </a:pPr>
-          </a:p>
-          <a:p>
-            <a:pPr>
-              <a:lnSpc>
-                <a:spcPct val="115000"/>
-              </a:lnSpc>
-              <a:spcAft>
-                <a:spcPts val="1000"/>
-              </a:spcAft>
-            </a:pPr>
-            <a:r>
-              <a:rPr sz="1900" b="1" i="0">
-                <a:solidFill>
-                  <a:srgbClr val="1F2937"/>
-                </a:solidFill>
-                <a:latin typeface="Calibri"/>
-              </a:rPr>
-              <a:t>•  So the same system needs different handling in different hands:</a:t>
-            </a:r>
-          </a:p>
-          <a:p>
-            <a:pPr lvl="1">
-              <a:lnSpc>
-                <a:spcPct val="115000"/>
-              </a:lnSpc>
-              <a:spcAft>
-                <a:spcPts val="500"/>
-              </a:spcAft>
-            </a:pPr>
-            <a:r>
-              <a:rPr sz="1600" b="0" i="0">
-                <a:solidFill>
-                  <a:srgbClr val="333D4B"/>
-                </a:solidFill>
-                <a:latin typeface="Calibri"/>
-              </a:rPr>
-              <a:t>—  Higher risk → more constraint, more quoting, earlier human review, narrower scope</a:t>
+              <a:t>—  Never state a diagnosis. Never suggest a medication change. Never include anything not stated in the source notes.</a:t>
             </a:r>
           </a:p>
         </p:txBody>

--- a/Lectures/week11/week11.pptx
+++ b/Lectures/week11/week11.pptx
@@ -22,6 +22,8 @@
     <p:sldId id="270" r:id="rId22"/>
     <p:sldId id="271" r:id="rId23"/>
     <p:sldId id="272" r:id="rId24"/>
+    <p:sldId id="273" r:id="rId25"/>
+    <p:sldId id="274" r:id="rId26"/>
   </p:sldIdLst>
   <p:sldSz cx="12191695" cy="6858000" type="screen4x3"/>
   <p:notesSz cx="6858000" cy="9144000"/>
@@ -1176,87 +1178,72 @@
           <a:lstStyle/>
           <a:p>
             <a:r>
-              <a:t>Be precise about what you've bought, because this is the slide where students most often</a:t>
-            </a:r>
-          </a:p>
-          <a:p>
-            <a:r>
-              <a:t>over-conclude.</a:t>
+              <a:t>Three examples, and the mistake is including only the first.</a:t>
             </a:r>
           </a:p>
           <a:p/>
           <a:p>
             <a:r>
-              <a:t>What it changes. Vocabulary becomes local. Structure becomes recognisable. Restraint appears</a:t>
-            </a:r>
-          </a:p>
-          <a:p>
-            <a:r>
-              <a:t>where it was absent. Output stops looking like the internet and starts looking like your</a:t>
-            </a:r>
-          </a:p>
-          <a:p>
-            <a:r>
-              <a:t>institution.</a:t>
+              <a:t>Typical: the ordinary case, done well. Establishes baseline shape, vocabulary and length. This is</a:t>
+            </a:r>
+          </a:p>
+          <a:p>
+            <a:r>
+              <a:t>the one everybody includes, and then they stop, because it feels sufficient. It isn't — it teaches</a:t>
+            </a:r>
+          </a:p>
+          <a:p>
+            <a:r>
+              <a:t>the system only what an easy day looks like.</a:t>
             </a:r>
           </a:p>
           <a:p/>
           <a:p>
             <a:r>
-              <a:t>What it does not change: accuracy. Not at all. A beautifully formatted SOAP note can contain a</a:t>
-            </a:r>
-          </a:p>
-          <a:p>
-            <a:r>
-              <a:t>completely fabricated finding, sitting in the Objective section, looking exactly like a</a:t>
-            </a:r>
-          </a:p>
-          <a:p>
-            <a:r>
-              <a:t>measurement.</a:t>
+              <a:t>Complex: more going on than usual. Several issues at once, competing considerations. This shows</a:t>
+            </a:r>
+          </a:p>
+          <a:p>
+            <a:r>
+              <a:t>how the shape holds up under load, and where the structure bends rather than breaking.</a:t>
             </a:r>
           </a:p>
           <a:p/>
           <a:p>
             <a:r>
-              <a:t>And read the second sub-point carefully, because it's the uncomfortable one. If anything,</a:t>
-            </a:r>
-          </a:p>
-          <a:p>
-            <a:r>
-              <a:t>professional formatting makes wrong content *more* persuasive, not less. You've taken output</a:t>
-            </a:r>
-          </a:p>
-          <a:p>
-            <a:r>
-              <a:t>with a known error rate and dressed it in the visual language of professional authority. A</a:t>
-            </a:r>
-          </a:p>
-          <a:p>
-            <a:r>
-              <a:t>colleague glancing at it will trust it more than they would have trusted the generic version.</a:t>
+              <a:t>Edge case: the one that doesn't fit the standard shape, and — crucially — what you do about it.</a:t>
+            </a:r>
+          </a:p>
+          <a:p>
+            <a:r>
+              <a:t>This is the one that teaches most, because it shows the judgment the format cannot express.</a:t>
             </a:r>
           </a:p>
           <a:p/>
           <a:p>
             <a:r>
-              <a:t>So you've increased both usefulness and risk simultaneously.</a:t>
+              <a:t>Think about what an edge case actually encodes. It says: here is a situation where the rules don't</a:t>
+            </a:r>
+          </a:p>
+          <a:p>
+            <a:r>
+              <a:t>quite apply, and here is what an experienced person does. That is precisely the tribal knowledge</a:t>
+            </a:r>
+          </a:p>
+          <a:p>
+            <a:r>
+              <a:t>that never gets written down, and precisely what the model has no access to.</a:t>
             </a:r>
           </a:p>
           <a:p/>
           <a:p>
             <a:r>
-              <a:t>Which is why the bold line matters: a Domain Pack makes output usable. Grounding and testing</a:t>
-            </a:r>
-          </a:p>
-          <a:p>
-            <a:r>
-              <a:t>make it trustworthy. You need all three, and doing only this one leaves you worse off than</a:t>
-            </a:r>
-          </a:p>
-          <a:p>
-            <a:r>
-              <a:t>doing none.</a:t>
+              <a:t>If you include only one example, make it the edge case. It carries more information about how your</a:t>
+            </a:r>
+          </a:p>
+          <a:p>
+            <a:r>
+              <a:t>field actually works than the typical one does.</a:t>
             </a:r>
           </a:p>
         </p:txBody>
@@ -1326,57 +1313,78 @@
           <a:lstStyle/>
           <a:p>
             <a:r>
-              <a:t>What's examinable. Five items.</a:t>
+              <a:t>Maintenance, briefly, because a pack written once and never revisited slowly stops matching how</a:t>
+            </a:r>
+          </a:p>
+          <a:p>
+            <a:r>
+              <a:t>you work — and worse, it does so silently.</a:t>
             </a:r>
           </a:p>
           <a:p/>
           <a:p>
             <a:r>
-              <a:t>The Domain Pack and its three components, including the edge-case example and the restraint</a:t>
-            </a:r>
-          </a:p>
-          <a:p>
-            <a:r>
-              <a:t>statements.</a:t>
+              <a:t>Three triggers, each of which costs a minute.</a:t>
             </a:r>
           </a:p>
           <a:p/>
           <a:p>
             <a:r>
-              <a:t>Why professional structures exist — each makes a particular error visible. Be ready to explain</a:t>
-            </a:r>
-          </a:p>
-          <a:p>
-            <a:r>
-              <a:t>SOAP's S/O split and IRAC's rule-before-application. That's a strong short-answer question.</a:t>
+              <a:t>Add a term whenever the output misreads one. That misreading is the evidence you needed; you don't</a:t>
+            </a:r>
+          </a:p>
+          <a:p>
+            <a:r>
+              <a:t>have to sit down and brainstorm the glossary, you just have to notice and record.</a:t>
             </a:r>
           </a:p>
           <a:p/>
           <a:p>
             <a:r>
-              <a:t>The three gaps in generic output: local vocabulary, expected shape, conventional restraint.</a:t>
+              <a:t>Replace a golden example when your conventions change. And note the risk if you don't: an outdated</a:t>
+            </a:r>
+          </a:p>
+          <a:p>
+            <a:r>
+              <a:t>example teaches the old way, confidently, to everyone who uses the pack. That's worse than having</a:t>
+            </a:r>
+          </a:p>
+          <a:p>
+            <a:r>
+              <a:t>no example, because it's authoritative and wrong.</a:t>
             </a:r>
           </a:p>
           <a:p/>
           <a:p>
             <a:r>
-              <a:t>Risk varies by field rather than by system. Expect a scenario asking why the same assistant</a:t>
-            </a:r>
-          </a:p>
-          <a:p>
-            <a:r>
-              <a:t>needs different controls in a clinic and a marketing department.</a:t>
+              <a:t>Add a "never" statement whenever the output says something a professional would not have said.</a:t>
             </a:r>
           </a:p>
           <a:p/>
           <a:p>
             <a:r>
-              <a:t>And formatting is not accuracy — with the sting in the tail: professional formatting can</a:t>
-            </a:r>
-          </a:p>
-          <a:p>
-            <a:r>
-              <a:t>increase over-trust. That's a likely question because it's counterintuitive.</a:t>
+              <a:t>Ten minutes every few months. And I'd ask you to treat it as a document your successor will</a:t>
+            </a:r>
+          </a:p>
+          <a:p>
+            <a:r>
+              <a:t>inherit, because in most institutions it will end up being the only written record of how the work</a:t>
+            </a:r>
+          </a:p>
+          <a:p>
+            <a:r>
+              <a:t>is actually done.</a:t>
+            </a:r>
+          </a:p>
+          <a:p/>
+          <a:p>
+            <a:r>
+              <a:t>That's a slightly odd outcome for an AI course. But I've seen it happen more than once — the</a:t>
+            </a:r>
+          </a:p>
+          <a:p>
+            <a:r>
+              <a:t>useful artifact turns out to be the written-down knowledge, not the assistant.</a:t>
             </a:r>
           </a:p>
         </p:txBody>
@@ -1446,79 +1454,87 @@
           <a:lstStyle/>
           <a:p>
             <a:r>
-              <a:t>Five things.</a:t>
+              <a:t>Be precise about what you've bought, because this is the slide where students most often</a:t>
+            </a:r>
+          </a:p>
+          <a:p>
+            <a:r>
+              <a:t>over-conclude.</a:t>
             </a:r>
           </a:p>
           <a:p/>
           <a:p>
             <a:r>
-              <a:t>Generic output fails on vocabulary, shape and restraint — not usually on facts. Which is why</a:t>
-            </a:r>
-          </a:p>
-          <a:p>
-            <a:r>
-              <a:t>people dismiss the problem as cosmetic and why they're wrong to.</a:t>
+              <a:t>What it changes. Vocabulary becomes local. Structure becomes recognisable. Restraint appears</a:t>
+            </a:r>
+          </a:p>
+          <a:p>
+            <a:r>
+              <a:t>where it was absent. Output stops looking like the internet and starts looking like your</a:t>
+            </a:r>
+          </a:p>
+          <a:p>
+            <a:r>
+              <a:t>institution.</a:t>
             </a:r>
           </a:p>
           <a:p/>
           <a:p>
             <a:r>
-              <a:t>A Domain Pack is a glossary, golden examples, and output conventions. Written once, reused</a:t>
-            </a:r>
-          </a:p>
-          <a:p>
-            <a:r>
-              <a:t>forever. Genuinely, keep yours.</a:t>
+              <a:t>What it does not change: accuracy. Not at all. A beautifully formatted SOAP note can contain a</a:t>
+            </a:r>
+          </a:p>
+          <a:p>
+            <a:r>
+              <a:t>completely fabricated finding, sitting in the Objective section, looking exactly like a</a:t>
+            </a:r>
+          </a:p>
+          <a:p>
+            <a:r>
+              <a:t>measurement.</a:t>
             </a:r>
           </a:p>
           <a:p/>
           <a:p>
             <a:r>
-              <a:t>Professional structures exist to make specific errors visible. That's the design principle</a:t>
-            </a:r>
-          </a:p>
-          <a:p>
-            <a:r>
-              <a:t>worth carrying.</a:t>
+              <a:t>And read the second sub-point carefully, because it's the uncomfortable one. If anything,</a:t>
+            </a:r>
+          </a:p>
+          <a:p>
+            <a:r>
+              <a:t>professional formatting makes wrong content *more* persuasive, not less. You've taken output</a:t>
+            </a:r>
+          </a:p>
+          <a:p>
+            <a:r>
+              <a:t>with a known error rate and dressed it in the visual language of professional authority. A</a:t>
+            </a:r>
+          </a:p>
+          <a:p>
+            <a:r>
+              <a:t>colleague glancing at it will trust it more than they would have trusted the generic version.</a:t>
             </a:r>
           </a:p>
           <a:p/>
           <a:p>
             <a:r>
-              <a:t>Formatting makes output usable and more persuasive. It does not make it correct — and the gap</a:t>
-            </a:r>
-          </a:p>
-          <a:p>
-            <a:r>
-              <a:t>between those two is where professional harm happens.</a:t>
+              <a:t>So you've increased both usefulness and risk simultaneously.</a:t>
             </a:r>
           </a:p>
           <a:p/>
           <a:p>
             <a:r>
-              <a:t>And risk varies by field. Higher stakes need more constraint and earlier review.</a:t>
-            </a:r>
-          </a:p>
-          <a:p/>
-          <a:p>
-            <a:r>
-              <a:t>Next week is the one people remember. We attack an assistant together — I've built one for the</a:t>
-            </a:r>
-          </a:p>
-          <a:p>
-            <a:r>
-              <a:t>purpose and I'd like you to break it. You'll see how little effort it takes, and then we'll fix</a:t>
-            </a:r>
-          </a:p>
-          <a:p>
-            <a:r>
-              <a:t>it, and then you'll know what to check in anything you build.</a:t>
-            </a:r>
-          </a:p>
-          <a:p/>
-          <a:p>
-            <a:r>
-              <a:t>Bring a laptop if you can. Questions?</a:t>
+              <a:t>Which is why the bold line matters: a Domain Pack makes output usable. Grounding and testing</a:t>
+            </a:r>
+          </a:p>
+          <a:p>
+            <a:r>
+              <a:t>make it trustworthy. You need all three, and doing only this one leaves you worse off than</a:t>
+            </a:r>
+          </a:p>
+          <a:p>
+            <a:r>
+              <a:t>doing none.</a:t>
             </a:r>
           </a:p>
         </p:txBody>
@@ -1544,6 +1560,268 @@
 </file>
 
 <file path=ppt/notesSlides/notesSlide17.xml><?xml version="1.0" encoding="utf-8"?>
+<p:notes xmlns:a="http://schemas.openxmlformats.org/drawingml/2006/main" xmlns:p="http://schemas.openxmlformats.org/presentationml/2006/main" xmlns:r="http://schemas.openxmlformats.org/officeDocument/2006/relationships">
+  <p:cSld>
+    <p:spTree>
+      <p:nvGrpSpPr>
+        <p:cNvPr id="1" name=""/>
+        <p:cNvGrpSpPr/>
+        <p:nvPr/>
+      </p:nvGrpSpPr>
+      <p:grpSpPr>
+        <a:xfrm>
+          <a:off x="0" y="0"/>
+          <a:ext cx="0" cy="0"/>
+          <a:chOff x="0" y="0"/>
+          <a:chExt cx="0" cy="0"/>
+        </a:xfrm>
+      </p:grpSpPr>
+      <p:sp>
+        <p:nvSpPr>
+          <p:cNvPr id="2" name="Slide Image Placeholder 1"/>
+          <p:cNvSpPr>
+            <a:spLocks noGrp="1"/>
+          </p:cNvSpPr>
+          <p:nvPr>
+            <p:ph type="sldImg" idx="2"/>
+          </p:nvPr>
+        </p:nvSpPr>
+        <p:spPr/>
+      </p:sp>
+      <p:sp>
+        <p:nvSpPr>
+          <p:cNvPr id="3" name="Notes Placeholder 2"/>
+          <p:cNvSpPr>
+            <a:spLocks noGrp="1"/>
+          </p:cNvSpPr>
+          <p:nvPr>
+            <p:ph type="body" idx="3" sz="quarter"/>
+          </p:nvPr>
+        </p:nvSpPr>
+        <p:spPr/>
+        <p:txBody>
+          <a:bodyPr/>
+          <a:lstStyle/>
+          <a:p>
+            <a:r>
+              <a:t>What's examinable. Five items.</a:t>
+            </a:r>
+          </a:p>
+          <a:p/>
+          <a:p>
+            <a:r>
+              <a:t>The Domain Pack and its three components, including the edge-case example and the restraint</a:t>
+            </a:r>
+          </a:p>
+          <a:p>
+            <a:r>
+              <a:t>statements.</a:t>
+            </a:r>
+          </a:p>
+          <a:p/>
+          <a:p>
+            <a:r>
+              <a:t>Why professional structures exist — each makes a particular error visible. Be ready to explain</a:t>
+            </a:r>
+          </a:p>
+          <a:p>
+            <a:r>
+              <a:t>SOAP's S/O split and IRAC's rule-before-application. That's a strong short-answer question.</a:t>
+            </a:r>
+          </a:p>
+          <a:p/>
+          <a:p>
+            <a:r>
+              <a:t>The three gaps in generic output: local vocabulary, expected shape, conventional restraint.</a:t>
+            </a:r>
+          </a:p>
+          <a:p/>
+          <a:p>
+            <a:r>
+              <a:t>Risk varies by field rather than by system. Expect a scenario asking why the same assistant</a:t>
+            </a:r>
+          </a:p>
+          <a:p>
+            <a:r>
+              <a:t>needs different controls in a clinic and a marketing department.</a:t>
+            </a:r>
+          </a:p>
+          <a:p/>
+          <a:p>
+            <a:r>
+              <a:t>And formatting is not accuracy — with the sting in the tail: professional formatting can</a:t>
+            </a:r>
+          </a:p>
+          <a:p>
+            <a:r>
+              <a:t>increase over-trust. That's a likely question because it's counterintuitive.</a:t>
+            </a:r>
+          </a:p>
+        </p:txBody>
+      </p:sp>
+      <p:sp>
+        <p:nvSpPr>
+          <p:cNvPr id="4" name="Slide Number Placeholder 3"/>
+          <p:cNvSpPr>
+            <a:spLocks noGrp="1"/>
+          </p:cNvSpPr>
+          <p:nvPr>
+            <p:ph type="sldNum" idx="5" sz="quarter"/>
+          </p:nvPr>
+        </p:nvSpPr>
+        <p:spPr/>
+      </p:sp>
+    </p:spTree>
+  </p:cSld>
+  <p:clrMapOvr>
+    <a:masterClrMapping/>
+  </p:clrMapOvr>
+</p:notes>
+</file>
+
+<file path=ppt/notesSlides/notesSlide18.xml><?xml version="1.0" encoding="utf-8"?>
+<p:notes xmlns:a="http://schemas.openxmlformats.org/drawingml/2006/main" xmlns:p="http://schemas.openxmlformats.org/presentationml/2006/main" xmlns:r="http://schemas.openxmlformats.org/officeDocument/2006/relationships">
+  <p:cSld>
+    <p:spTree>
+      <p:nvGrpSpPr>
+        <p:cNvPr id="1" name=""/>
+        <p:cNvGrpSpPr/>
+        <p:nvPr/>
+      </p:nvGrpSpPr>
+      <p:grpSpPr>
+        <a:xfrm>
+          <a:off x="0" y="0"/>
+          <a:ext cx="0" cy="0"/>
+          <a:chOff x="0" y="0"/>
+          <a:chExt cx="0" cy="0"/>
+        </a:xfrm>
+      </p:grpSpPr>
+      <p:sp>
+        <p:nvSpPr>
+          <p:cNvPr id="2" name="Slide Image Placeholder 1"/>
+          <p:cNvSpPr>
+            <a:spLocks noGrp="1"/>
+          </p:cNvSpPr>
+          <p:nvPr>
+            <p:ph type="sldImg" idx="2"/>
+          </p:nvPr>
+        </p:nvSpPr>
+        <p:spPr/>
+      </p:sp>
+      <p:sp>
+        <p:nvSpPr>
+          <p:cNvPr id="3" name="Notes Placeholder 2"/>
+          <p:cNvSpPr>
+            <a:spLocks noGrp="1"/>
+          </p:cNvSpPr>
+          <p:nvPr>
+            <p:ph type="body" idx="3" sz="quarter"/>
+          </p:nvPr>
+        </p:nvSpPr>
+        <p:spPr/>
+        <p:txBody>
+          <a:bodyPr/>
+          <a:lstStyle/>
+          <a:p>
+            <a:r>
+              <a:t>Five things.</a:t>
+            </a:r>
+          </a:p>
+          <a:p/>
+          <a:p>
+            <a:r>
+              <a:t>Generic output fails on vocabulary, shape and restraint — not usually on facts. Which is why</a:t>
+            </a:r>
+          </a:p>
+          <a:p>
+            <a:r>
+              <a:t>people dismiss the problem as cosmetic and why they're wrong to.</a:t>
+            </a:r>
+          </a:p>
+          <a:p/>
+          <a:p>
+            <a:r>
+              <a:t>A Domain Pack is a glossary, golden examples, and output conventions. Written once, reused</a:t>
+            </a:r>
+          </a:p>
+          <a:p>
+            <a:r>
+              <a:t>forever. Genuinely, keep yours.</a:t>
+            </a:r>
+          </a:p>
+          <a:p/>
+          <a:p>
+            <a:r>
+              <a:t>Professional structures exist to make specific errors visible. That's the design principle</a:t>
+            </a:r>
+          </a:p>
+          <a:p>
+            <a:r>
+              <a:t>worth carrying.</a:t>
+            </a:r>
+          </a:p>
+          <a:p/>
+          <a:p>
+            <a:r>
+              <a:t>Formatting makes output usable and more persuasive. It does not make it correct — and the gap</a:t>
+            </a:r>
+          </a:p>
+          <a:p>
+            <a:r>
+              <a:t>between those two is where professional harm happens.</a:t>
+            </a:r>
+          </a:p>
+          <a:p/>
+          <a:p>
+            <a:r>
+              <a:t>And risk varies by field. Higher stakes need more constraint and earlier review.</a:t>
+            </a:r>
+          </a:p>
+          <a:p/>
+          <a:p>
+            <a:r>
+              <a:t>Next week is the one people remember. We attack an assistant together — I've built one for the</a:t>
+            </a:r>
+          </a:p>
+          <a:p>
+            <a:r>
+              <a:t>purpose and I'd like you to break it. You'll see how little effort it takes, and then we'll fix</a:t>
+            </a:r>
+          </a:p>
+          <a:p>
+            <a:r>
+              <a:t>it, and then you'll know what to check in anything you build.</a:t>
+            </a:r>
+          </a:p>
+          <a:p/>
+          <a:p>
+            <a:r>
+              <a:t>Bring a laptop if you can. Questions?</a:t>
+            </a:r>
+          </a:p>
+        </p:txBody>
+      </p:sp>
+      <p:sp>
+        <p:nvSpPr>
+          <p:cNvPr id="4" name="Slide Number Placeholder 3"/>
+          <p:cNvSpPr>
+            <a:spLocks noGrp="1"/>
+          </p:cNvSpPr>
+          <p:nvPr>
+            <p:ph type="sldNum" idx="5" sz="quarter"/>
+          </p:nvPr>
+        </p:nvSpPr>
+        <p:spPr/>
+      </p:sp>
+    </p:spTree>
+  </p:cSld>
+  <p:clrMapOvr>
+    <a:masterClrMapping/>
+  </p:clrMapOvr>
+</p:notes>
+</file>
+
+<file path=ppt/notesSlides/notesSlide19.xml><?xml version="1.0" encoding="utf-8"?>
 <p:notes xmlns:a="http://schemas.openxmlformats.org/drawingml/2006/main" xmlns:p="http://schemas.openxmlformats.org/presentationml/2006/main" xmlns:r="http://schemas.openxmlformats.org/officeDocument/2006/relationships">
   <p:cSld>
     <p:spTree>
@@ -7108,7 +7386,7 @@
                 </a:solidFill>
                 <a:latin typeface="Calibri Light"/>
               </a:rPr>
-              <a:t>What the Pack Changes — and What It Does Not</a:t>
+              <a:t>What Makes a Golden Example Good</a:t>
             </a:r>
           </a:p>
         </p:txBody>
@@ -7159,14 +7437,106 @@
       </p:sp>
       <p:sp>
         <p:nvSpPr>
-          <p:cNvPr id="4" name="TextBox 3"/>
+          <p:cNvPr id="4" name="Rounded Rectangle 3"/>
+          <p:cNvSpPr/>
+          <p:nvPr/>
+        </p:nvSpPr>
+        <p:spPr>
+          <a:xfrm>
+            <a:off x="777240" y="2057400"/>
+            <a:ext cx="3301898" cy="3200400"/>
+          </a:xfrm>
+          <a:prstGeom prst="roundRect">
+            <a:avLst>
+              <a:gd name="adj" fmla="val 10000"/>
+            </a:avLst>
+          </a:prstGeom>
+          <a:solidFill>
+            <a:srgbClr val="F1F5F9"/>
+          </a:solidFill>
+          <a:ln w="15875">
+            <a:solidFill>
+              <a:srgbClr val="D3DDE6"/>
+            </a:solidFill>
+          </a:ln>
+          <a:effectLst/>
+        </p:spPr>
+        <p:style>
+          <a:lnRef idx="1">
+            <a:schemeClr val="accent1"/>
+          </a:lnRef>
+          <a:fillRef idx="3">
+            <a:schemeClr val="accent1"/>
+          </a:fillRef>
+          <a:effectRef idx="2">
+            <a:schemeClr val="accent1"/>
+          </a:effectRef>
+          <a:fontRef idx="minor">
+            <a:schemeClr val="lt1"/>
+          </a:fontRef>
+        </p:style>
+        <p:txBody>
+          <a:bodyPr rtlCol="0" anchor="ctr"/>
+          <a:lstStyle/>
+          <a:p>
+            <a:pPr algn="ctr"/>
+          </a:p>
+        </p:txBody>
+      </p:sp>
+      <p:sp>
+        <p:nvSpPr>
+          <p:cNvPr id="5" name="Rectangle 4"/>
+          <p:cNvSpPr/>
+          <p:nvPr/>
+        </p:nvSpPr>
+        <p:spPr>
+          <a:xfrm>
+            <a:off x="978408" y="2331720"/>
+            <a:ext cx="640080" cy="38100"/>
+          </a:xfrm>
+          <a:prstGeom prst="rect">
+            <a:avLst/>
+          </a:prstGeom>
+          <a:solidFill>
+            <a:srgbClr val="0F766E"/>
+          </a:solidFill>
+          <a:ln>
+            <a:noFill/>
+          </a:ln>
+          <a:effectLst/>
+        </p:spPr>
+        <p:style>
+          <a:lnRef idx="1">
+            <a:schemeClr val="accent1"/>
+          </a:lnRef>
+          <a:fillRef idx="3">
+            <a:schemeClr val="accent1"/>
+          </a:fillRef>
+          <a:effectRef idx="2">
+            <a:schemeClr val="accent1"/>
+          </a:effectRef>
+          <a:fontRef idx="minor">
+            <a:schemeClr val="lt1"/>
+          </a:fontRef>
+        </p:style>
+        <p:txBody>
+          <a:bodyPr rtlCol="0" anchor="ctr"/>
+          <a:lstStyle/>
+          <a:p>
+            <a:pPr algn="ctr"/>
+          </a:p>
+        </p:txBody>
+      </p:sp>
+      <p:sp>
+        <p:nvSpPr>
+          <p:cNvPr id="6" name="TextBox 5"/>
           <p:cNvSpPr txBox="1"/>
           <p:nvPr/>
         </p:nvSpPr>
         <p:spPr>
           <a:xfrm>
-            <a:off x="777240" y="1783080"/>
-            <a:ext cx="10637215" cy="4343400"/>
+            <a:off x="978408" y="2560320"/>
+            <a:ext cx="2899562" cy="640080"/>
           </a:xfrm>
           <a:prstGeom prst="rect">
             <a:avLst/>
@@ -7174,175 +7544,41 @@
           <a:noFill/>
         </p:spPr>
         <p:txBody>
-          <a:bodyPr wrap="square" lIns="0" rIns="0" tIns="0" bIns="0">
+          <a:bodyPr wrap="square" lIns="0" rIns="0" tIns="0" bIns="0" anchor="t">
             <a:spAutoFit/>
           </a:bodyPr>
           <a:lstStyle/>
           <a:p>
-            <a:pPr>
+            <a:pPr algn="l">
               <a:lnSpc>
-                <a:spcPct val="115000"/>
+                <a:spcPct val="105000"/>
               </a:lnSpc>
               <a:spcAft>
-                <a:spcPts val="1000"/>
+                <a:spcPts val="200"/>
               </a:spcAft>
             </a:pPr>
             <a:r>
-              <a:rPr sz="1900" b="1" i="0">
+              <a:rPr sz="1800" b="1" i="0">
                 <a:solidFill>
                   <a:srgbClr val="1F2937"/>
                 </a:solidFill>
                 <a:latin typeface="Calibri"/>
               </a:rPr>
-              <a:t>•  What it changes:</a:t>
-            </a:r>
-          </a:p>
-          <a:p>
-            <a:pPr lvl="1">
-              <a:lnSpc>
-                <a:spcPct val="115000"/>
-              </a:lnSpc>
-              <a:spcAft>
-                <a:spcPts val="500"/>
-              </a:spcAft>
-            </a:pPr>
-            <a:r>
-              <a:rPr sz="1600" b="0" i="0">
-                <a:solidFill>
-                  <a:srgbClr val="333D4B"/>
-                </a:solidFill>
-                <a:latin typeface="Calibri"/>
-              </a:rPr>
-              <a:t>—  Vocabulary becomes local. Structure becomes recognisable. Restraint appears where it was absent.</a:t>
-            </a:r>
-          </a:p>
-          <a:p>
-            <a:pPr lvl="1">
-              <a:lnSpc>
-                <a:spcPct val="115000"/>
-              </a:lnSpc>
-              <a:spcAft>
-                <a:spcPts val="500"/>
-              </a:spcAft>
-            </a:pPr>
-            <a:r>
-              <a:rPr sz="1600" b="0" i="0">
-                <a:solidFill>
-                  <a:srgbClr val="333D4B"/>
-                </a:solidFill>
-                <a:latin typeface="Calibri"/>
-              </a:rPr>
-              <a:t>—  Output stops looking like the internet and starts looking like your institution</a:t>
-            </a:r>
-          </a:p>
-          <a:p>
-            <a:pPr>
-              <a:lnSpc>
-                <a:spcPct val="115000"/>
-              </a:lnSpc>
-              <a:spcAft>
-                <a:spcPts val="1000"/>
-              </a:spcAft>
-            </a:pPr>
-          </a:p>
-          <a:p>
-            <a:pPr>
-              <a:lnSpc>
-                <a:spcPct val="115000"/>
-              </a:lnSpc>
-              <a:spcAft>
-                <a:spcPts val="1000"/>
-              </a:spcAft>
-            </a:pPr>
-            <a:r>
-              <a:rPr sz="1900" b="1" i="0">
-                <a:solidFill>
-                  <a:srgbClr val="1F2937"/>
-                </a:solidFill>
-                <a:latin typeface="Calibri"/>
-              </a:rPr>
-              <a:t>•  What it does not change:</a:t>
-            </a:r>
-          </a:p>
-          <a:p>
-            <a:pPr lvl="1">
-              <a:lnSpc>
-                <a:spcPct val="115000"/>
-              </a:lnSpc>
-              <a:spcAft>
-                <a:spcPts val="500"/>
-              </a:spcAft>
-            </a:pPr>
-            <a:r>
-              <a:rPr sz="1600" b="0" i="0">
-                <a:solidFill>
-                  <a:srgbClr val="333D4B"/>
-                </a:solidFill>
-                <a:latin typeface="Calibri"/>
-              </a:rPr>
-              <a:t>—  Accuracy. A well-formatted SOAP note can contain a fabricated finding.</a:t>
-            </a:r>
-          </a:p>
-          <a:p>
-            <a:pPr lvl="1">
-              <a:lnSpc>
-                <a:spcPct val="115000"/>
-              </a:lnSpc>
-              <a:spcAft>
-                <a:spcPts val="500"/>
-              </a:spcAft>
-            </a:pPr>
-            <a:r>
-              <a:rPr sz="1600" b="0" i="0">
-                <a:solidFill>
-                  <a:srgbClr val="333D4B"/>
-                </a:solidFill>
-                <a:latin typeface="Calibri"/>
-              </a:rPr>
-              <a:t>—  If anything, professional formatting makes wrong content more persuasive, not less</a:t>
-            </a:r>
-          </a:p>
-          <a:p>
-            <a:pPr>
-              <a:lnSpc>
-                <a:spcPct val="115000"/>
-              </a:lnSpc>
-              <a:spcAft>
-                <a:spcPts val="1000"/>
-              </a:spcAft>
-            </a:pPr>
-          </a:p>
-          <a:p>
-            <a:pPr>
-              <a:lnSpc>
-                <a:spcPct val="115000"/>
-              </a:lnSpc>
-              <a:spcAft>
-                <a:spcPts val="1000"/>
-              </a:spcAft>
-            </a:pPr>
-            <a:r>
-              <a:rPr sz="1900" b="1" i="0">
-                <a:solidFill>
-                  <a:srgbClr val="1F2937"/>
-                </a:solidFill>
-                <a:latin typeface="Calibri"/>
-              </a:rPr>
-              <a:t>•  A Domain Pack makes output usable. Grounding and testing make it trustworthy. You need all three.</a:t>
-            </a:r>
-          </a:p>
-        </p:txBody>
-      </p:sp>
-      <p:sp>
-        <p:nvSpPr>
-          <p:cNvPr id="5" name="TextBox 4"/>
+              <a:t>Typical</a:t>
+            </a:r>
+          </a:p>
+        </p:txBody>
+      </p:sp>
+      <p:sp>
+        <p:nvSpPr>
+          <p:cNvPr id="7" name="TextBox 6"/>
           <p:cNvSpPr txBox="1"/>
           <p:nvPr/>
         </p:nvSpPr>
         <p:spPr>
           <a:xfrm>
-            <a:off x="777240" y="6355080"/>
-            <a:ext cx="10637215" cy="274320"/>
+            <a:off x="978408" y="3246120"/>
+            <a:ext cx="2899562" cy="1737360"/>
           </a:xfrm>
           <a:prstGeom prst="rect">
             <a:avLst/>
@@ -7350,6 +7586,400 @@
           <a:noFill/>
         </p:spPr>
         <p:txBody>
+          <a:bodyPr wrap="square" lIns="0" rIns="0" tIns="0" bIns="0" anchor="t">
+            <a:spAutoFit/>
+          </a:bodyPr>
+          <a:lstStyle/>
+          <a:p>
+            <a:pPr algn="l">
+              <a:lnSpc>
+                <a:spcPct val="105000"/>
+              </a:lnSpc>
+              <a:spcAft>
+                <a:spcPts val="200"/>
+              </a:spcAft>
+            </a:pPr>
+            <a:r>
+              <a:rPr sz="1350" b="0" i="0">
+                <a:solidFill>
+                  <a:srgbClr val="333D4B"/>
+                </a:solidFill>
+                <a:latin typeface="Calibri"/>
+              </a:rPr>
+              <a:t>The ordinary case, done well. Establishes the baseline shape, vocabulary and length. This is the one people include and then stop.</a:t>
+            </a:r>
+          </a:p>
+        </p:txBody>
+      </p:sp>
+      <p:sp>
+        <p:nvSpPr>
+          <p:cNvPr id="8" name="Rounded Rectangle 7"/>
+          <p:cNvSpPr/>
+          <p:nvPr/>
+        </p:nvSpPr>
+        <p:spPr>
+          <a:xfrm>
+            <a:off x="4444898" y="2057400"/>
+            <a:ext cx="3301898" cy="3200400"/>
+          </a:xfrm>
+          <a:prstGeom prst="roundRect">
+            <a:avLst>
+              <a:gd name="adj" fmla="val 10000"/>
+            </a:avLst>
+          </a:prstGeom>
+          <a:solidFill>
+            <a:srgbClr val="F1F5F9"/>
+          </a:solidFill>
+          <a:ln w="15875">
+            <a:solidFill>
+              <a:srgbClr val="D3DDE6"/>
+            </a:solidFill>
+          </a:ln>
+          <a:effectLst/>
+        </p:spPr>
+        <p:style>
+          <a:lnRef idx="1">
+            <a:schemeClr val="accent1"/>
+          </a:lnRef>
+          <a:fillRef idx="3">
+            <a:schemeClr val="accent1"/>
+          </a:fillRef>
+          <a:effectRef idx="2">
+            <a:schemeClr val="accent1"/>
+          </a:effectRef>
+          <a:fontRef idx="minor">
+            <a:schemeClr val="lt1"/>
+          </a:fontRef>
+        </p:style>
+        <p:txBody>
+          <a:bodyPr rtlCol="0" anchor="ctr"/>
+          <a:lstStyle/>
+          <a:p>
+            <a:pPr algn="ctr"/>
+          </a:p>
+        </p:txBody>
+      </p:sp>
+      <p:sp>
+        <p:nvSpPr>
+          <p:cNvPr id="9" name="Rectangle 8"/>
+          <p:cNvSpPr/>
+          <p:nvPr/>
+        </p:nvSpPr>
+        <p:spPr>
+          <a:xfrm>
+            <a:off x="4646066" y="2331720"/>
+            <a:ext cx="640080" cy="38100"/>
+          </a:xfrm>
+          <a:prstGeom prst="rect">
+            <a:avLst/>
+          </a:prstGeom>
+          <a:solidFill>
+            <a:srgbClr val="0F766E"/>
+          </a:solidFill>
+          <a:ln>
+            <a:noFill/>
+          </a:ln>
+          <a:effectLst/>
+        </p:spPr>
+        <p:style>
+          <a:lnRef idx="1">
+            <a:schemeClr val="accent1"/>
+          </a:lnRef>
+          <a:fillRef idx="3">
+            <a:schemeClr val="accent1"/>
+          </a:fillRef>
+          <a:effectRef idx="2">
+            <a:schemeClr val="accent1"/>
+          </a:effectRef>
+          <a:fontRef idx="minor">
+            <a:schemeClr val="lt1"/>
+          </a:fontRef>
+        </p:style>
+        <p:txBody>
+          <a:bodyPr rtlCol="0" anchor="ctr"/>
+          <a:lstStyle/>
+          <a:p>
+            <a:pPr algn="ctr"/>
+          </a:p>
+        </p:txBody>
+      </p:sp>
+      <p:sp>
+        <p:nvSpPr>
+          <p:cNvPr id="10" name="TextBox 9"/>
+          <p:cNvSpPr txBox="1"/>
+          <p:nvPr/>
+        </p:nvSpPr>
+        <p:spPr>
+          <a:xfrm>
+            <a:off x="4646066" y="2560320"/>
+            <a:ext cx="2899562" cy="640080"/>
+          </a:xfrm>
+          <a:prstGeom prst="rect">
+            <a:avLst/>
+          </a:prstGeom>
+          <a:noFill/>
+        </p:spPr>
+        <p:txBody>
+          <a:bodyPr wrap="square" lIns="0" rIns="0" tIns="0" bIns="0" anchor="t">
+            <a:spAutoFit/>
+          </a:bodyPr>
+          <a:lstStyle/>
+          <a:p>
+            <a:pPr algn="l">
+              <a:lnSpc>
+                <a:spcPct val="105000"/>
+              </a:lnSpc>
+              <a:spcAft>
+                <a:spcPts val="200"/>
+              </a:spcAft>
+            </a:pPr>
+            <a:r>
+              <a:rPr sz="1800" b="1" i="0">
+                <a:solidFill>
+                  <a:srgbClr val="1F2937"/>
+                </a:solidFill>
+                <a:latin typeface="Calibri"/>
+              </a:rPr>
+              <a:t>Complex</a:t>
+            </a:r>
+          </a:p>
+        </p:txBody>
+      </p:sp>
+      <p:sp>
+        <p:nvSpPr>
+          <p:cNvPr id="11" name="TextBox 10"/>
+          <p:cNvSpPr txBox="1"/>
+          <p:nvPr/>
+        </p:nvSpPr>
+        <p:spPr>
+          <a:xfrm>
+            <a:off x="4646066" y="3246120"/>
+            <a:ext cx="2899562" cy="1737360"/>
+          </a:xfrm>
+          <a:prstGeom prst="rect">
+            <a:avLst/>
+          </a:prstGeom>
+          <a:noFill/>
+        </p:spPr>
+        <p:txBody>
+          <a:bodyPr wrap="square" lIns="0" rIns="0" tIns="0" bIns="0" anchor="t">
+            <a:spAutoFit/>
+          </a:bodyPr>
+          <a:lstStyle/>
+          <a:p>
+            <a:pPr algn="l">
+              <a:lnSpc>
+                <a:spcPct val="105000"/>
+              </a:lnSpc>
+              <a:spcAft>
+                <a:spcPts val="200"/>
+              </a:spcAft>
+            </a:pPr>
+            <a:r>
+              <a:rPr sz="1350" b="0" i="0">
+                <a:solidFill>
+                  <a:srgbClr val="333D4B"/>
+                </a:solidFill>
+                <a:latin typeface="Calibri"/>
+              </a:rPr>
+              <a:t>More going on than usual — several issues, competing considerations. Shows how the shape holds up under load, and where the structure bends.</a:t>
+            </a:r>
+          </a:p>
+        </p:txBody>
+      </p:sp>
+      <p:sp>
+        <p:nvSpPr>
+          <p:cNvPr id="12" name="Rounded Rectangle 11"/>
+          <p:cNvSpPr/>
+          <p:nvPr/>
+        </p:nvSpPr>
+        <p:spPr>
+          <a:xfrm>
+            <a:off x="8112556" y="2057400"/>
+            <a:ext cx="3301898" cy="3200400"/>
+          </a:xfrm>
+          <a:prstGeom prst="roundRect">
+            <a:avLst>
+              <a:gd name="adj" fmla="val 10000"/>
+            </a:avLst>
+          </a:prstGeom>
+          <a:solidFill>
+            <a:srgbClr val="F1F5F9"/>
+          </a:solidFill>
+          <a:ln w="15875">
+            <a:solidFill>
+              <a:srgbClr val="D3DDE6"/>
+            </a:solidFill>
+          </a:ln>
+          <a:effectLst/>
+        </p:spPr>
+        <p:style>
+          <a:lnRef idx="1">
+            <a:schemeClr val="accent1"/>
+          </a:lnRef>
+          <a:fillRef idx="3">
+            <a:schemeClr val="accent1"/>
+          </a:fillRef>
+          <a:effectRef idx="2">
+            <a:schemeClr val="accent1"/>
+          </a:effectRef>
+          <a:fontRef idx="minor">
+            <a:schemeClr val="lt1"/>
+          </a:fontRef>
+        </p:style>
+        <p:txBody>
+          <a:bodyPr rtlCol="0" anchor="ctr"/>
+          <a:lstStyle/>
+          <a:p>
+            <a:pPr algn="ctr"/>
+          </a:p>
+        </p:txBody>
+      </p:sp>
+      <p:sp>
+        <p:nvSpPr>
+          <p:cNvPr id="13" name="Rectangle 12"/>
+          <p:cNvSpPr/>
+          <p:nvPr/>
+        </p:nvSpPr>
+        <p:spPr>
+          <a:xfrm>
+            <a:off x="8313724" y="2331720"/>
+            <a:ext cx="640080" cy="38100"/>
+          </a:xfrm>
+          <a:prstGeom prst="rect">
+            <a:avLst/>
+          </a:prstGeom>
+          <a:solidFill>
+            <a:srgbClr val="0F766E"/>
+          </a:solidFill>
+          <a:ln>
+            <a:noFill/>
+          </a:ln>
+          <a:effectLst/>
+        </p:spPr>
+        <p:style>
+          <a:lnRef idx="1">
+            <a:schemeClr val="accent1"/>
+          </a:lnRef>
+          <a:fillRef idx="3">
+            <a:schemeClr val="accent1"/>
+          </a:fillRef>
+          <a:effectRef idx="2">
+            <a:schemeClr val="accent1"/>
+          </a:effectRef>
+          <a:fontRef idx="minor">
+            <a:schemeClr val="lt1"/>
+          </a:fontRef>
+        </p:style>
+        <p:txBody>
+          <a:bodyPr rtlCol="0" anchor="ctr"/>
+          <a:lstStyle/>
+          <a:p>
+            <a:pPr algn="ctr"/>
+          </a:p>
+        </p:txBody>
+      </p:sp>
+      <p:sp>
+        <p:nvSpPr>
+          <p:cNvPr id="14" name="TextBox 13"/>
+          <p:cNvSpPr txBox="1"/>
+          <p:nvPr/>
+        </p:nvSpPr>
+        <p:spPr>
+          <a:xfrm>
+            <a:off x="8313724" y="2560320"/>
+            <a:ext cx="2899562" cy="640080"/>
+          </a:xfrm>
+          <a:prstGeom prst="rect">
+            <a:avLst/>
+          </a:prstGeom>
+          <a:noFill/>
+        </p:spPr>
+        <p:txBody>
+          <a:bodyPr wrap="square" lIns="0" rIns="0" tIns="0" bIns="0" anchor="t">
+            <a:spAutoFit/>
+          </a:bodyPr>
+          <a:lstStyle/>
+          <a:p>
+            <a:pPr algn="l">
+              <a:lnSpc>
+                <a:spcPct val="105000"/>
+              </a:lnSpc>
+              <a:spcAft>
+                <a:spcPts val="200"/>
+              </a:spcAft>
+            </a:pPr>
+            <a:r>
+              <a:rPr sz="1800" b="1" i="0">
+                <a:solidFill>
+                  <a:srgbClr val="1F2937"/>
+                </a:solidFill>
+                <a:latin typeface="Calibri"/>
+              </a:rPr>
+              <a:t>Edge case</a:t>
+            </a:r>
+          </a:p>
+        </p:txBody>
+      </p:sp>
+      <p:sp>
+        <p:nvSpPr>
+          <p:cNvPr id="15" name="TextBox 14"/>
+          <p:cNvSpPr txBox="1"/>
+          <p:nvPr/>
+        </p:nvSpPr>
+        <p:spPr>
+          <a:xfrm>
+            <a:off x="8313724" y="3246120"/>
+            <a:ext cx="2899562" cy="1737360"/>
+          </a:xfrm>
+          <a:prstGeom prst="rect">
+            <a:avLst/>
+          </a:prstGeom>
+          <a:noFill/>
+        </p:spPr>
+        <p:txBody>
+          <a:bodyPr wrap="square" lIns="0" rIns="0" tIns="0" bIns="0" anchor="t">
+            <a:spAutoFit/>
+          </a:bodyPr>
+          <a:lstStyle/>
+          <a:p>
+            <a:pPr algn="l">
+              <a:lnSpc>
+                <a:spcPct val="105000"/>
+              </a:lnSpc>
+              <a:spcAft>
+                <a:spcPts val="200"/>
+              </a:spcAft>
+            </a:pPr>
+            <a:r>
+              <a:rPr sz="1350" b="0" i="0">
+                <a:solidFill>
+                  <a:srgbClr val="333D4B"/>
+                </a:solidFill>
+                <a:latin typeface="Calibri"/>
+              </a:rPr>
+              <a:t>The one that does not fit the standard shape, and what you do about it. This teaches most, because it shows the judgment the format cannot express.</a:t>
+            </a:r>
+          </a:p>
+        </p:txBody>
+      </p:sp>
+      <p:sp>
+        <p:nvSpPr>
+          <p:cNvPr id="16" name="TextBox 15"/>
+          <p:cNvSpPr txBox="1"/>
+          <p:nvPr/>
+        </p:nvSpPr>
+        <p:spPr>
+          <a:xfrm>
+            <a:off x="777240" y="6355080"/>
+            <a:ext cx="10637215" cy="274320"/>
+          </a:xfrm>
+          <a:prstGeom prst="rect">
+            <a:avLst/>
+          </a:prstGeom>
+          <a:noFill/>
+        </p:spPr>
+        <p:txBody>
           <a:bodyPr wrap="square" lIns="0" rIns="0" tIns="0" bIns="0">
             <a:spAutoFit/>
           </a:bodyPr>
@@ -7369,7 +7999,7 @@
       </p:sp>
       <p:sp>
         <p:nvSpPr>
-          <p:cNvPr id="6" name="TextBox 5"/>
+          <p:cNvPr id="17" name="TextBox 16"/>
           <p:cNvSpPr txBox="1"/>
           <p:nvPr/>
         </p:nvSpPr>
@@ -7449,7 +8079,7 @@
                 </a:solidFill>
                 <a:latin typeface="Calibri Light"/>
               </a:rPr>
-              <a:t>Concepts You Must Be Able to Define and Diagnose</a:t>
+              <a:t>Keeping the Pack Current</a:t>
             </a:r>
           </a:p>
         </p:txBody>
@@ -7500,58 +8130,14 @@
       </p:sp>
       <p:sp>
         <p:nvSpPr>
-          <p:cNvPr id="4" name="Rectangle 3"/>
-          <p:cNvSpPr/>
-          <p:nvPr/>
-        </p:nvSpPr>
-        <p:spPr>
-          <a:xfrm>
-            <a:off x="777240" y="1783080"/>
-            <a:ext cx="10637215" cy="4251960"/>
-          </a:xfrm>
-          <a:prstGeom prst="rect">
-            <a:avLst/>
-          </a:prstGeom>
-          <a:solidFill>
-            <a:srgbClr val="F1F5F9"/>
-          </a:solidFill>
-          <a:ln>
-            <a:noFill/>
-          </a:ln>
-          <a:effectLst/>
-        </p:spPr>
-        <p:style>
-          <a:lnRef idx="1">
-            <a:schemeClr val="accent1"/>
-          </a:lnRef>
-          <a:fillRef idx="3">
-            <a:schemeClr val="accent1"/>
-          </a:fillRef>
-          <a:effectRef idx="2">
-            <a:schemeClr val="accent1"/>
-          </a:effectRef>
-          <a:fontRef idx="minor">
-            <a:schemeClr val="lt1"/>
-          </a:fontRef>
-        </p:style>
-        <p:txBody>
-          <a:bodyPr rtlCol="0" anchor="ctr"/>
-          <a:lstStyle/>
-          <a:p>
-            <a:pPr algn="ctr"/>
-          </a:p>
-        </p:txBody>
-      </p:sp>
-      <p:sp>
-        <p:nvSpPr>
-          <p:cNvPr id="5" name="TextBox 4"/>
+          <p:cNvPr id="4" name="TextBox 3"/>
           <p:cNvSpPr txBox="1"/>
           <p:nvPr/>
         </p:nvSpPr>
         <p:spPr>
           <a:xfrm>
-            <a:off x="1188720" y="2103120"/>
-            <a:ext cx="9814255" cy="3611880"/>
+            <a:off x="777240" y="1783080"/>
+            <a:ext cx="10637215" cy="4343400"/>
           </a:xfrm>
           <a:prstGeom prst="rect">
             <a:avLst/>
@@ -7573,14 +8159,24 @@
               </a:spcAft>
             </a:pPr>
             <a:r>
-              <a:rPr sz="1900" b="1" i="0">
+              <a:rPr sz="1900" b="0" i="0">
                 <a:solidFill>
                   <a:srgbClr val="1F2937"/>
                 </a:solidFill>
                 <a:latin typeface="Calibri"/>
               </a:rPr>
-              <a:t>•  The Domain Pack</a:t>
-            </a:r>
+              <a:t>•  A pack written once and never revisited slowly stops matching how you work</a:t>
+            </a:r>
+          </a:p>
+          <a:p>
+            <a:pPr>
+              <a:lnSpc>
+                <a:spcPct val="115000"/>
+              </a:lnSpc>
+              <a:spcAft>
+                <a:spcPts val="1000"/>
+              </a:spcAft>
+            </a:pPr>
           </a:p>
           <a:p>
             <a:pPr lvl="1">
@@ -7598,7 +8194,45 @@
                 </a:solidFill>
                 <a:latin typeface="Calibri"/>
               </a:rPr>
-              <a:t>—  Glossary of locally-defined terms · golden examples including an edge case · output conventions including what must never appear.</a:t>
+              <a:t>—  Add a term whenever output misreads one — that misreading is the evidence you needed</a:t>
+            </a:r>
+          </a:p>
+          <a:p>
+            <a:pPr lvl="1">
+              <a:lnSpc>
+                <a:spcPct val="115000"/>
+              </a:lnSpc>
+              <a:spcAft>
+                <a:spcPts val="500"/>
+              </a:spcAft>
+            </a:pPr>
+            <a:r>
+              <a:rPr sz="1600" b="0" i="0">
+                <a:solidFill>
+                  <a:srgbClr val="333D4B"/>
+                </a:solidFill>
+                <a:latin typeface="Calibri"/>
+              </a:rPr>
+              <a:t>—  Replace a golden example when your conventions change; an outdated example teaches the old way confidently</a:t>
+            </a:r>
+          </a:p>
+          <a:p>
+            <a:pPr lvl="1">
+              <a:lnSpc>
+                <a:spcPct val="115000"/>
+              </a:lnSpc>
+              <a:spcAft>
+                <a:spcPts val="500"/>
+              </a:spcAft>
+            </a:pPr>
+            <a:r>
+              <a:rPr sz="1600" b="0" i="0">
+                <a:solidFill>
+                  <a:srgbClr val="333D4B"/>
+                </a:solidFill>
+                <a:latin typeface="Calibri"/>
+              </a:rPr>
+              <a:t>—  Add a "never" statement whenever output says something a professional would not have said</a:t>
             </a:r>
           </a:p>
           <a:p>
@@ -7610,6 +8244,16 @@
                 <a:spcPts val="1000"/>
               </a:spcAft>
             </a:pPr>
+          </a:p>
+          <a:p>
+            <a:pPr>
+              <a:lnSpc>
+                <a:spcPct val="115000"/>
+              </a:lnSpc>
+              <a:spcAft>
+                <a:spcPts val="1000"/>
+              </a:spcAft>
+            </a:pPr>
             <a:r>
               <a:rPr sz="1900" b="1" i="0">
                 <a:solidFill>
@@ -7617,7 +8261,7 @@
                 </a:solidFill>
                 <a:latin typeface="Calibri"/>
               </a:rPr>
-              <a:t>•  Why professional structures exist</a:t>
+              <a:t>•  Ten minutes every few months. Treat it as a document your successor will inherit.</a:t>
             </a:r>
           </a:p>
           <a:p>
@@ -7636,128 +8280,14 @@
                 </a:solidFill>
                 <a:latin typeface="Calibri"/>
               </a:rPr>
-              <a:t>—  Each makes a particular error visible — SOAP separates report from measurement; IRAC states the rule before applying it.</a:t>
-            </a:r>
-          </a:p>
-          <a:p>
-            <a:pPr>
-              <a:lnSpc>
-                <a:spcPct val="115000"/>
-              </a:lnSpc>
-              <a:spcAft>
-                <a:spcPts val="1000"/>
-              </a:spcAft>
-            </a:pPr>
-            <a:r>
-              <a:rPr sz="1900" b="1" i="0">
-                <a:solidFill>
-                  <a:srgbClr val="1F2937"/>
-                </a:solidFill>
-                <a:latin typeface="Calibri"/>
-              </a:rPr>
-              <a:t>•  Three gaps in generic output</a:t>
-            </a:r>
-          </a:p>
-          <a:p>
-            <a:pPr lvl="1">
-              <a:lnSpc>
-                <a:spcPct val="115000"/>
-              </a:lnSpc>
-              <a:spcAft>
-                <a:spcPts val="500"/>
-              </a:spcAft>
-            </a:pPr>
-            <a:r>
-              <a:rPr sz="1600" b="0" i="0">
-                <a:solidFill>
-                  <a:srgbClr val="333D4B"/>
-                </a:solidFill>
-                <a:latin typeface="Calibri"/>
-              </a:rPr>
-              <a:t>—  Local vocabulary · expected shape · conventional restraint.</a:t>
-            </a:r>
-          </a:p>
-          <a:p>
-            <a:pPr>
-              <a:lnSpc>
-                <a:spcPct val="115000"/>
-              </a:lnSpc>
-              <a:spcAft>
-                <a:spcPts val="1000"/>
-              </a:spcAft>
-            </a:pPr>
-            <a:r>
-              <a:rPr sz="1900" b="1" i="0">
-                <a:solidFill>
-                  <a:srgbClr val="1F2937"/>
-                </a:solidFill>
-                <a:latin typeface="Calibri"/>
-              </a:rPr>
-              <a:t>•  Risk varies by field, not by system</a:t>
-            </a:r>
-          </a:p>
-          <a:p>
-            <a:pPr lvl="1">
-              <a:lnSpc>
-                <a:spcPct val="115000"/>
-              </a:lnSpc>
-              <a:spcAft>
-                <a:spcPts val="500"/>
-              </a:spcAft>
-            </a:pPr>
-            <a:r>
-              <a:rPr sz="1600" b="0" i="0">
-                <a:solidFill>
-                  <a:srgbClr val="333D4B"/>
-                </a:solidFill>
-                <a:latin typeface="Calibri"/>
-              </a:rPr>
-              <a:t>—  Identical output carries different consequences. Higher risk demands more constraint, more quoting, earlier review.</a:t>
-            </a:r>
-          </a:p>
-          <a:p>
-            <a:pPr>
-              <a:lnSpc>
-                <a:spcPct val="115000"/>
-              </a:lnSpc>
-              <a:spcAft>
-                <a:spcPts val="1000"/>
-              </a:spcAft>
-            </a:pPr>
-            <a:r>
-              <a:rPr sz="1900" b="1" i="0">
-                <a:solidFill>
-                  <a:srgbClr val="1F2937"/>
-                </a:solidFill>
-                <a:latin typeface="Calibri"/>
-              </a:rPr>
-              <a:t>•  Formatting is not accuracy</a:t>
-            </a:r>
-          </a:p>
-          <a:p>
-            <a:pPr lvl="1">
-              <a:lnSpc>
-                <a:spcPct val="115000"/>
-              </a:lnSpc>
-              <a:spcAft>
-                <a:spcPts val="500"/>
-              </a:spcAft>
-            </a:pPr>
-            <a:r>
-              <a:rPr sz="1600" b="0" i="0">
-                <a:solidFill>
-                  <a:srgbClr val="333D4B"/>
-                </a:solidFill>
-                <a:latin typeface="Calibri"/>
-              </a:rPr>
-              <a:t>—  A Domain Pack makes output usable and more persuasive. It does nothing for correctness — and may increase over-trust.</a:t>
-            </a:r>
-          </a:p>
-        </p:txBody>
-      </p:sp>
-      <p:sp>
-        <p:nvSpPr>
-          <p:cNvPr id="6" name="TextBox 5"/>
+              <a:t>—  In most institutions it will be the only written record of how the work is actually done.</a:t>
+            </a:r>
+          </a:p>
+        </p:txBody>
+      </p:sp>
+      <p:sp>
+        <p:nvSpPr>
+          <p:cNvPr id="5" name="TextBox 4"/>
           <p:cNvSpPr txBox="1"/>
           <p:nvPr/>
         </p:nvSpPr>
@@ -7791,7 +8321,7 @@
       </p:sp>
       <p:sp>
         <p:nvSpPr>
-          <p:cNvPr id="7" name="TextBox 6"/>
+          <p:cNvPr id="6" name="TextBox 5"/>
           <p:cNvSpPr txBox="1"/>
           <p:nvPr/>
         </p:nvSpPr>
@@ -7871,7 +8401,7 @@
                 </a:solidFill>
                 <a:latin typeface="Calibri Light"/>
               </a:rPr>
-              <a:t>Wrap-Up</a:t>
+              <a:t>What the Pack Changes — and What It Does Not</a:t>
             </a:r>
           </a:p>
         </p:txBody>
@@ -7951,13 +8481,51 @@
               </a:spcAft>
             </a:pPr>
             <a:r>
-              <a:rPr sz="1900" b="0" i="0">
+              <a:rPr sz="1900" b="1" i="0">
                 <a:solidFill>
                   <a:srgbClr val="1F2937"/>
                 </a:solidFill>
                 <a:latin typeface="Calibri"/>
               </a:rPr>
-              <a:t>•  Generic output fails on vocabulary, shape and restraint — not usually on facts</a:t>
+              <a:t>•  What it changes:</a:t>
+            </a:r>
+          </a:p>
+          <a:p>
+            <a:pPr lvl="1">
+              <a:lnSpc>
+                <a:spcPct val="115000"/>
+              </a:lnSpc>
+              <a:spcAft>
+                <a:spcPts val="500"/>
+              </a:spcAft>
+            </a:pPr>
+            <a:r>
+              <a:rPr sz="1600" b="0" i="0">
+                <a:solidFill>
+                  <a:srgbClr val="333D4B"/>
+                </a:solidFill>
+                <a:latin typeface="Calibri"/>
+              </a:rPr>
+              <a:t>—  Vocabulary becomes local. Structure becomes recognisable. Restraint appears where it was absent.</a:t>
+            </a:r>
+          </a:p>
+          <a:p>
+            <a:pPr lvl="1">
+              <a:lnSpc>
+                <a:spcPct val="115000"/>
+              </a:lnSpc>
+              <a:spcAft>
+                <a:spcPts val="500"/>
+              </a:spcAft>
+            </a:pPr>
+            <a:r>
+              <a:rPr sz="1600" b="0" i="0">
+                <a:solidFill>
+                  <a:srgbClr val="333D4B"/>
+                </a:solidFill>
+                <a:latin typeface="Calibri"/>
+              </a:rPr>
+              <a:t>—  Output stops looking like the internet and starts looking like your institution</a:t>
             </a:r>
           </a:p>
           <a:p>
@@ -7969,15 +8537,6 @@
                 <a:spcPts val="1000"/>
               </a:spcAft>
             </a:pPr>
-            <a:r>
-              <a:rPr sz="1900" b="0" i="0">
-                <a:solidFill>
-                  <a:srgbClr val="1F2937"/>
-                </a:solidFill>
-                <a:latin typeface="Calibri"/>
-              </a:rPr>
-              <a:t>•  A Domain Pack is a glossary, golden examples, and output conventions. Written once, reused forever.</a:t>
-            </a:r>
           </a:p>
           <a:p>
             <a:pPr>
@@ -7989,13 +8548,51 @@
               </a:spcAft>
             </a:pPr>
             <a:r>
-              <a:rPr sz="1900" b="0" i="0">
+              <a:rPr sz="1900" b="1" i="0">
                 <a:solidFill>
                   <a:srgbClr val="1F2937"/>
                 </a:solidFill>
                 <a:latin typeface="Calibri"/>
               </a:rPr>
-              <a:t>•  Professional structures exist to make specific errors visible</a:t>
+              <a:t>•  What it does not change:</a:t>
+            </a:r>
+          </a:p>
+          <a:p>
+            <a:pPr lvl="1">
+              <a:lnSpc>
+                <a:spcPct val="115000"/>
+              </a:lnSpc>
+              <a:spcAft>
+                <a:spcPts val="500"/>
+              </a:spcAft>
+            </a:pPr>
+            <a:r>
+              <a:rPr sz="1600" b="0" i="0">
+                <a:solidFill>
+                  <a:srgbClr val="333D4B"/>
+                </a:solidFill>
+                <a:latin typeface="Calibri"/>
+              </a:rPr>
+              <a:t>—  Accuracy. A well-formatted SOAP note can contain a fabricated finding.</a:t>
+            </a:r>
+          </a:p>
+          <a:p>
+            <a:pPr lvl="1">
+              <a:lnSpc>
+                <a:spcPct val="115000"/>
+              </a:lnSpc>
+              <a:spcAft>
+                <a:spcPts val="500"/>
+              </a:spcAft>
+            </a:pPr>
+            <a:r>
+              <a:rPr sz="1600" b="0" i="0">
+                <a:solidFill>
+                  <a:srgbClr val="333D4B"/>
+                </a:solidFill>
+                <a:latin typeface="Calibri"/>
+              </a:rPr>
+              <a:t>—  If anything, professional formatting makes wrong content more persuasive, not less</a:t>
             </a:r>
           </a:p>
           <a:p>
@@ -8007,15 +8604,6 @@
                 <a:spcPts val="1000"/>
               </a:spcAft>
             </a:pPr>
-            <a:r>
-              <a:rPr sz="1900" b="1" i="0">
-                <a:solidFill>
-                  <a:srgbClr val="1F2937"/>
-                </a:solidFill>
-                <a:latin typeface="Calibri"/>
-              </a:rPr>
-              <a:t>•  Formatting makes output usable and more persuasive. It does not make it correct.</a:t>
-            </a:r>
           </a:p>
           <a:p>
             <a:pPr>
@@ -8027,61 +8615,13 @@
               </a:spcAft>
             </a:pPr>
             <a:r>
-              <a:rPr sz="1900" b="0" i="0">
+              <a:rPr sz="1900" b="1" i="0">
                 <a:solidFill>
                   <a:srgbClr val="1F2937"/>
                 </a:solidFill>
                 <a:latin typeface="Calibri"/>
               </a:rPr>
-              <a:t>•  Risk varies by field: higher stakes need more constraint and earlier review</a:t>
-            </a:r>
-          </a:p>
-          <a:p>
-            <a:pPr>
-              <a:lnSpc>
-                <a:spcPct val="115000"/>
-              </a:lnSpc>
-              <a:spcAft>
-                <a:spcPts val="1000"/>
-              </a:spcAft>
-            </a:pPr>
-          </a:p>
-          <a:p>
-            <a:pPr>
-              <a:lnSpc>
-                <a:spcPct val="115000"/>
-              </a:lnSpc>
-              <a:spcAft>
-                <a:spcPts val="1000"/>
-              </a:spcAft>
-            </a:pPr>
-            <a:r>
-              <a:rPr sz="1900" b="1" i="0">
-                <a:solidFill>
-                  <a:srgbClr val="1F2937"/>
-                </a:solidFill>
-                <a:latin typeface="Calibri"/>
-              </a:rPr>
-              <a:t>•  Next week:</a:t>
-            </a:r>
-          </a:p>
-          <a:p>
-            <a:pPr lvl="1">
-              <a:lnSpc>
-                <a:spcPct val="115000"/>
-              </a:lnSpc>
-              <a:spcAft>
-                <a:spcPts val="500"/>
-              </a:spcAft>
-            </a:pPr>
-            <a:r>
-              <a:rPr sz="1600" b="0" i="0">
-                <a:solidFill>
-                  <a:srgbClr val="333D4B"/>
-                </a:solidFill>
-                <a:latin typeface="Calibri"/>
-              </a:rPr>
-              <a:t>—  Prompt Injection and AI Security — we attack an assistant together and see how easy it is</a:t>
+              <a:t>•  A Domain Pack makes output usable. Grounding and testing make it trustworthy. You need all three.</a:t>
             </a:r>
           </a:p>
         </p:txBody>
@@ -8164,6 +8704,759 @@
 </file>
 
 <file path=ppt/slides/slide17.xml><?xml version="1.0" encoding="utf-8"?>
+<p:sld xmlns:a="http://schemas.openxmlformats.org/drawingml/2006/main" xmlns:p="http://schemas.openxmlformats.org/presentationml/2006/main" xmlns:r="http://schemas.openxmlformats.org/officeDocument/2006/relationships">
+  <p:cSld>
+    <p:spTree>
+      <p:nvGrpSpPr>
+        <p:cNvPr id="1" name=""/>
+        <p:cNvGrpSpPr/>
+        <p:nvPr/>
+      </p:nvGrpSpPr>
+      <p:grpSpPr/>
+      <p:sp>
+        <p:nvSpPr>
+          <p:cNvPr id="2" name="TextBox 1"/>
+          <p:cNvSpPr txBox="1"/>
+          <p:nvPr/>
+        </p:nvSpPr>
+        <p:spPr>
+          <a:xfrm>
+            <a:off x="777240" y="566928"/>
+            <a:ext cx="10637215" cy="822960"/>
+          </a:xfrm>
+          <a:prstGeom prst="rect">
+            <a:avLst/>
+          </a:prstGeom>
+          <a:noFill/>
+        </p:spPr>
+        <p:txBody>
+          <a:bodyPr wrap="square" lIns="0" rIns="0" tIns="0" bIns="0">
+            <a:spAutoFit/>
+          </a:bodyPr>
+          <a:lstStyle/>
+          <a:p>
+            <a:r>
+              <a:rPr sz="3000" b="1" i="0">
+                <a:solidFill>
+                  <a:srgbClr val="1F2937"/>
+                </a:solidFill>
+                <a:latin typeface="Calibri Light"/>
+              </a:rPr>
+              <a:t>Concepts You Must Be Able to Define and Diagnose</a:t>
+            </a:r>
+          </a:p>
+        </p:txBody>
+      </p:sp>
+      <p:sp>
+        <p:nvSpPr>
+          <p:cNvPr id="3" name="Rectangle 2"/>
+          <p:cNvSpPr/>
+          <p:nvPr/>
+        </p:nvSpPr>
+        <p:spPr>
+          <a:xfrm>
+            <a:off x="777240" y="1417320"/>
+            <a:ext cx="1051560" cy="38100"/>
+          </a:xfrm>
+          <a:prstGeom prst="rect">
+            <a:avLst/>
+          </a:prstGeom>
+          <a:solidFill>
+            <a:srgbClr val="0F766E"/>
+          </a:solidFill>
+          <a:ln>
+            <a:noFill/>
+          </a:ln>
+          <a:effectLst/>
+        </p:spPr>
+        <p:style>
+          <a:lnRef idx="1">
+            <a:schemeClr val="accent1"/>
+          </a:lnRef>
+          <a:fillRef idx="3">
+            <a:schemeClr val="accent1"/>
+          </a:fillRef>
+          <a:effectRef idx="2">
+            <a:schemeClr val="accent1"/>
+          </a:effectRef>
+          <a:fontRef idx="minor">
+            <a:schemeClr val="lt1"/>
+          </a:fontRef>
+        </p:style>
+        <p:txBody>
+          <a:bodyPr rtlCol="0" anchor="ctr"/>
+          <a:lstStyle/>
+          <a:p>
+            <a:pPr algn="ctr"/>
+          </a:p>
+        </p:txBody>
+      </p:sp>
+      <p:sp>
+        <p:nvSpPr>
+          <p:cNvPr id="4" name="Rectangle 3"/>
+          <p:cNvSpPr/>
+          <p:nvPr/>
+        </p:nvSpPr>
+        <p:spPr>
+          <a:xfrm>
+            <a:off x="777240" y="1783080"/>
+            <a:ext cx="10637215" cy="4251960"/>
+          </a:xfrm>
+          <a:prstGeom prst="rect">
+            <a:avLst/>
+          </a:prstGeom>
+          <a:solidFill>
+            <a:srgbClr val="F1F5F9"/>
+          </a:solidFill>
+          <a:ln>
+            <a:noFill/>
+          </a:ln>
+          <a:effectLst/>
+        </p:spPr>
+        <p:style>
+          <a:lnRef idx="1">
+            <a:schemeClr val="accent1"/>
+          </a:lnRef>
+          <a:fillRef idx="3">
+            <a:schemeClr val="accent1"/>
+          </a:fillRef>
+          <a:effectRef idx="2">
+            <a:schemeClr val="accent1"/>
+          </a:effectRef>
+          <a:fontRef idx="minor">
+            <a:schemeClr val="lt1"/>
+          </a:fontRef>
+        </p:style>
+        <p:txBody>
+          <a:bodyPr rtlCol="0" anchor="ctr"/>
+          <a:lstStyle/>
+          <a:p>
+            <a:pPr algn="ctr"/>
+          </a:p>
+        </p:txBody>
+      </p:sp>
+      <p:sp>
+        <p:nvSpPr>
+          <p:cNvPr id="5" name="TextBox 4"/>
+          <p:cNvSpPr txBox="1"/>
+          <p:nvPr/>
+        </p:nvSpPr>
+        <p:spPr>
+          <a:xfrm>
+            <a:off x="1188720" y="2103120"/>
+            <a:ext cx="9814255" cy="3611880"/>
+          </a:xfrm>
+          <a:prstGeom prst="rect">
+            <a:avLst/>
+          </a:prstGeom>
+          <a:noFill/>
+        </p:spPr>
+        <p:txBody>
+          <a:bodyPr wrap="square" lIns="0" rIns="0" tIns="0" bIns="0">
+            <a:spAutoFit/>
+          </a:bodyPr>
+          <a:lstStyle/>
+          <a:p>
+            <a:pPr>
+              <a:lnSpc>
+                <a:spcPct val="115000"/>
+              </a:lnSpc>
+              <a:spcAft>
+                <a:spcPts val="1000"/>
+              </a:spcAft>
+            </a:pPr>
+            <a:r>
+              <a:rPr sz="1900" b="1" i="0">
+                <a:solidFill>
+                  <a:srgbClr val="1F2937"/>
+                </a:solidFill>
+                <a:latin typeface="Calibri"/>
+              </a:rPr>
+              <a:t>•  The Domain Pack</a:t>
+            </a:r>
+          </a:p>
+          <a:p>
+            <a:pPr lvl="1">
+              <a:lnSpc>
+                <a:spcPct val="115000"/>
+              </a:lnSpc>
+              <a:spcAft>
+                <a:spcPts val="500"/>
+              </a:spcAft>
+            </a:pPr>
+            <a:r>
+              <a:rPr sz="1600" b="0" i="0">
+                <a:solidFill>
+                  <a:srgbClr val="333D4B"/>
+                </a:solidFill>
+                <a:latin typeface="Calibri"/>
+              </a:rPr>
+              <a:t>—  Glossary of locally-defined terms · golden examples including an edge case · output conventions including what must never appear.</a:t>
+            </a:r>
+          </a:p>
+          <a:p>
+            <a:pPr>
+              <a:lnSpc>
+                <a:spcPct val="115000"/>
+              </a:lnSpc>
+              <a:spcAft>
+                <a:spcPts val="1000"/>
+              </a:spcAft>
+            </a:pPr>
+            <a:r>
+              <a:rPr sz="1900" b="1" i="0">
+                <a:solidFill>
+                  <a:srgbClr val="1F2937"/>
+                </a:solidFill>
+                <a:latin typeface="Calibri"/>
+              </a:rPr>
+              <a:t>•  Why professional structures exist</a:t>
+            </a:r>
+          </a:p>
+          <a:p>
+            <a:pPr lvl="1">
+              <a:lnSpc>
+                <a:spcPct val="115000"/>
+              </a:lnSpc>
+              <a:spcAft>
+                <a:spcPts val="500"/>
+              </a:spcAft>
+            </a:pPr>
+            <a:r>
+              <a:rPr sz="1600" b="0" i="0">
+                <a:solidFill>
+                  <a:srgbClr val="333D4B"/>
+                </a:solidFill>
+                <a:latin typeface="Calibri"/>
+              </a:rPr>
+              <a:t>—  Each makes a particular error visible — SOAP separates report from measurement; IRAC states the rule before applying it.</a:t>
+            </a:r>
+          </a:p>
+          <a:p>
+            <a:pPr>
+              <a:lnSpc>
+                <a:spcPct val="115000"/>
+              </a:lnSpc>
+              <a:spcAft>
+                <a:spcPts val="1000"/>
+              </a:spcAft>
+            </a:pPr>
+            <a:r>
+              <a:rPr sz="1900" b="1" i="0">
+                <a:solidFill>
+                  <a:srgbClr val="1F2937"/>
+                </a:solidFill>
+                <a:latin typeface="Calibri"/>
+              </a:rPr>
+              <a:t>•  Three gaps in generic output</a:t>
+            </a:r>
+          </a:p>
+          <a:p>
+            <a:pPr lvl="1">
+              <a:lnSpc>
+                <a:spcPct val="115000"/>
+              </a:lnSpc>
+              <a:spcAft>
+                <a:spcPts val="500"/>
+              </a:spcAft>
+            </a:pPr>
+            <a:r>
+              <a:rPr sz="1600" b="0" i="0">
+                <a:solidFill>
+                  <a:srgbClr val="333D4B"/>
+                </a:solidFill>
+                <a:latin typeface="Calibri"/>
+              </a:rPr>
+              <a:t>—  Local vocabulary · expected shape · conventional restraint.</a:t>
+            </a:r>
+          </a:p>
+          <a:p>
+            <a:pPr>
+              <a:lnSpc>
+                <a:spcPct val="115000"/>
+              </a:lnSpc>
+              <a:spcAft>
+                <a:spcPts val="1000"/>
+              </a:spcAft>
+            </a:pPr>
+            <a:r>
+              <a:rPr sz="1900" b="1" i="0">
+                <a:solidFill>
+                  <a:srgbClr val="1F2937"/>
+                </a:solidFill>
+                <a:latin typeface="Calibri"/>
+              </a:rPr>
+              <a:t>•  Risk varies by field, not by system</a:t>
+            </a:r>
+          </a:p>
+          <a:p>
+            <a:pPr lvl="1">
+              <a:lnSpc>
+                <a:spcPct val="115000"/>
+              </a:lnSpc>
+              <a:spcAft>
+                <a:spcPts val="500"/>
+              </a:spcAft>
+            </a:pPr>
+            <a:r>
+              <a:rPr sz="1600" b="0" i="0">
+                <a:solidFill>
+                  <a:srgbClr val="333D4B"/>
+                </a:solidFill>
+                <a:latin typeface="Calibri"/>
+              </a:rPr>
+              <a:t>—  Identical output carries different consequences. Higher risk demands more constraint, more quoting, earlier review.</a:t>
+            </a:r>
+          </a:p>
+          <a:p>
+            <a:pPr>
+              <a:lnSpc>
+                <a:spcPct val="115000"/>
+              </a:lnSpc>
+              <a:spcAft>
+                <a:spcPts val="1000"/>
+              </a:spcAft>
+            </a:pPr>
+            <a:r>
+              <a:rPr sz="1900" b="1" i="0">
+                <a:solidFill>
+                  <a:srgbClr val="1F2937"/>
+                </a:solidFill>
+                <a:latin typeface="Calibri"/>
+              </a:rPr>
+              <a:t>•  Formatting is not accuracy</a:t>
+            </a:r>
+          </a:p>
+          <a:p>
+            <a:pPr lvl="1">
+              <a:lnSpc>
+                <a:spcPct val="115000"/>
+              </a:lnSpc>
+              <a:spcAft>
+                <a:spcPts val="500"/>
+              </a:spcAft>
+            </a:pPr>
+            <a:r>
+              <a:rPr sz="1600" b="0" i="0">
+                <a:solidFill>
+                  <a:srgbClr val="333D4B"/>
+                </a:solidFill>
+                <a:latin typeface="Calibri"/>
+              </a:rPr>
+              <a:t>—  A Domain Pack makes output usable and more persuasive. It does nothing for correctness — and may increase over-trust.</a:t>
+            </a:r>
+          </a:p>
+        </p:txBody>
+      </p:sp>
+      <p:sp>
+        <p:nvSpPr>
+          <p:cNvPr id="6" name="TextBox 5"/>
+          <p:cNvSpPr txBox="1"/>
+          <p:nvPr/>
+        </p:nvSpPr>
+        <p:spPr>
+          <a:xfrm>
+            <a:off x="777240" y="6355080"/>
+            <a:ext cx="10637215" cy="274320"/>
+          </a:xfrm>
+          <a:prstGeom prst="rect">
+            <a:avLst/>
+          </a:prstGeom>
+          <a:noFill/>
+        </p:spPr>
+        <p:txBody>
+          <a:bodyPr wrap="square" lIns="0" rIns="0" tIns="0" bIns="0">
+            <a:spAutoFit/>
+          </a:bodyPr>
+          <a:lstStyle/>
+          <a:p>
+            <a:r>
+              <a:rPr sz="1000" b="0" i="0">
+                <a:solidFill>
+                  <a:srgbClr val="6B7787"/>
+                </a:solidFill>
+                <a:latin typeface="Calibri"/>
+              </a:rPr>
+              <a:t>Week 11  ·  Prompt Engineering and Large Language Models</a:t>
+            </a:r>
+          </a:p>
+        </p:txBody>
+      </p:sp>
+      <p:sp>
+        <p:nvSpPr>
+          <p:cNvPr id="7" name="TextBox 6"/>
+          <p:cNvSpPr txBox="1"/>
+          <p:nvPr/>
+        </p:nvSpPr>
+        <p:spPr>
+          <a:xfrm>
+            <a:off x="10500055" y="6355080"/>
+            <a:ext cx="914400" cy="274320"/>
+          </a:xfrm>
+          <a:prstGeom prst="rect">
+            <a:avLst/>
+          </a:prstGeom>
+          <a:noFill/>
+        </p:spPr>
+        <p:txBody>
+          <a:bodyPr wrap="square" lIns="0" rIns="0" tIns="0" bIns="0">
+            <a:spAutoFit/>
+          </a:bodyPr>
+          <a:lstStyle/>
+          <a:p>
+            <a:pPr algn="r"/>
+            <a:r>
+              <a:rPr sz="1000" b="0" i="0">
+                <a:solidFill>
+                  <a:srgbClr val="6B7787"/>
+                </a:solidFill>
+                <a:latin typeface="Calibri"/>
+              </a:rPr>
+              <a:t>17</a:t>
+            </a:r>
+          </a:p>
+        </p:txBody>
+      </p:sp>
+    </p:spTree>
+  </p:cSld>
+  <p:clrMapOvr>
+    <a:masterClrMapping/>
+  </p:clrMapOvr>
+</p:sld>
+</file>
+
+<file path=ppt/slides/slide18.xml><?xml version="1.0" encoding="utf-8"?>
+<p:sld xmlns:a="http://schemas.openxmlformats.org/drawingml/2006/main" xmlns:p="http://schemas.openxmlformats.org/presentationml/2006/main" xmlns:r="http://schemas.openxmlformats.org/officeDocument/2006/relationships">
+  <p:cSld>
+    <p:spTree>
+      <p:nvGrpSpPr>
+        <p:cNvPr id="1" name=""/>
+        <p:cNvGrpSpPr/>
+        <p:nvPr/>
+      </p:nvGrpSpPr>
+      <p:grpSpPr/>
+      <p:sp>
+        <p:nvSpPr>
+          <p:cNvPr id="2" name="TextBox 1"/>
+          <p:cNvSpPr txBox="1"/>
+          <p:nvPr/>
+        </p:nvSpPr>
+        <p:spPr>
+          <a:xfrm>
+            <a:off x="777240" y="566928"/>
+            <a:ext cx="10637215" cy="822960"/>
+          </a:xfrm>
+          <a:prstGeom prst="rect">
+            <a:avLst/>
+          </a:prstGeom>
+          <a:noFill/>
+        </p:spPr>
+        <p:txBody>
+          <a:bodyPr wrap="square" lIns="0" rIns="0" tIns="0" bIns="0">
+            <a:spAutoFit/>
+          </a:bodyPr>
+          <a:lstStyle/>
+          <a:p>
+            <a:r>
+              <a:rPr sz="3000" b="1" i="0">
+                <a:solidFill>
+                  <a:srgbClr val="1F2937"/>
+                </a:solidFill>
+                <a:latin typeface="Calibri Light"/>
+              </a:rPr>
+              <a:t>Wrap-Up</a:t>
+            </a:r>
+          </a:p>
+        </p:txBody>
+      </p:sp>
+      <p:sp>
+        <p:nvSpPr>
+          <p:cNvPr id="3" name="Rectangle 2"/>
+          <p:cNvSpPr/>
+          <p:nvPr/>
+        </p:nvSpPr>
+        <p:spPr>
+          <a:xfrm>
+            <a:off x="777240" y="1417320"/>
+            <a:ext cx="1051560" cy="38100"/>
+          </a:xfrm>
+          <a:prstGeom prst="rect">
+            <a:avLst/>
+          </a:prstGeom>
+          <a:solidFill>
+            <a:srgbClr val="0F766E"/>
+          </a:solidFill>
+          <a:ln>
+            <a:noFill/>
+          </a:ln>
+          <a:effectLst/>
+        </p:spPr>
+        <p:style>
+          <a:lnRef idx="1">
+            <a:schemeClr val="accent1"/>
+          </a:lnRef>
+          <a:fillRef idx="3">
+            <a:schemeClr val="accent1"/>
+          </a:fillRef>
+          <a:effectRef idx="2">
+            <a:schemeClr val="accent1"/>
+          </a:effectRef>
+          <a:fontRef idx="minor">
+            <a:schemeClr val="lt1"/>
+          </a:fontRef>
+        </p:style>
+        <p:txBody>
+          <a:bodyPr rtlCol="0" anchor="ctr"/>
+          <a:lstStyle/>
+          <a:p>
+            <a:pPr algn="ctr"/>
+          </a:p>
+        </p:txBody>
+      </p:sp>
+      <p:sp>
+        <p:nvSpPr>
+          <p:cNvPr id="4" name="TextBox 3"/>
+          <p:cNvSpPr txBox="1"/>
+          <p:nvPr/>
+        </p:nvSpPr>
+        <p:spPr>
+          <a:xfrm>
+            <a:off x="777240" y="1783080"/>
+            <a:ext cx="10637215" cy="4343400"/>
+          </a:xfrm>
+          <a:prstGeom prst="rect">
+            <a:avLst/>
+          </a:prstGeom>
+          <a:noFill/>
+        </p:spPr>
+        <p:txBody>
+          <a:bodyPr wrap="square" lIns="0" rIns="0" tIns="0" bIns="0">
+            <a:spAutoFit/>
+          </a:bodyPr>
+          <a:lstStyle/>
+          <a:p>
+            <a:pPr>
+              <a:lnSpc>
+                <a:spcPct val="115000"/>
+              </a:lnSpc>
+              <a:spcAft>
+                <a:spcPts val="1000"/>
+              </a:spcAft>
+            </a:pPr>
+            <a:r>
+              <a:rPr sz="1900" b="0" i="0">
+                <a:solidFill>
+                  <a:srgbClr val="1F2937"/>
+                </a:solidFill>
+                <a:latin typeface="Calibri"/>
+              </a:rPr>
+              <a:t>•  Generic output fails on vocabulary, shape and restraint — not usually on facts</a:t>
+            </a:r>
+          </a:p>
+          <a:p>
+            <a:pPr>
+              <a:lnSpc>
+                <a:spcPct val="115000"/>
+              </a:lnSpc>
+              <a:spcAft>
+                <a:spcPts val="1000"/>
+              </a:spcAft>
+            </a:pPr>
+            <a:r>
+              <a:rPr sz="1900" b="0" i="0">
+                <a:solidFill>
+                  <a:srgbClr val="1F2937"/>
+                </a:solidFill>
+                <a:latin typeface="Calibri"/>
+              </a:rPr>
+              <a:t>•  A Domain Pack is a glossary, golden examples, and output conventions. Written once, reused forever.</a:t>
+            </a:r>
+          </a:p>
+          <a:p>
+            <a:pPr>
+              <a:lnSpc>
+                <a:spcPct val="115000"/>
+              </a:lnSpc>
+              <a:spcAft>
+                <a:spcPts val="1000"/>
+              </a:spcAft>
+            </a:pPr>
+            <a:r>
+              <a:rPr sz="1900" b="0" i="0">
+                <a:solidFill>
+                  <a:srgbClr val="1F2937"/>
+                </a:solidFill>
+                <a:latin typeface="Calibri"/>
+              </a:rPr>
+              <a:t>•  Professional structures exist to make specific errors visible</a:t>
+            </a:r>
+          </a:p>
+          <a:p>
+            <a:pPr>
+              <a:lnSpc>
+                <a:spcPct val="115000"/>
+              </a:lnSpc>
+              <a:spcAft>
+                <a:spcPts val="1000"/>
+              </a:spcAft>
+            </a:pPr>
+            <a:r>
+              <a:rPr sz="1900" b="1" i="0">
+                <a:solidFill>
+                  <a:srgbClr val="1F2937"/>
+                </a:solidFill>
+                <a:latin typeface="Calibri"/>
+              </a:rPr>
+              <a:t>•  Formatting makes output usable and more persuasive. It does not make it correct.</a:t>
+            </a:r>
+          </a:p>
+          <a:p>
+            <a:pPr>
+              <a:lnSpc>
+                <a:spcPct val="115000"/>
+              </a:lnSpc>
+              <a:spcAft>
+                <a:spcPts val="1000"/>
+              </a:spcAft>
+            </a:pPr>
+            <a:r>
+              <a:rPr sz="1900" b="0" i="0">
+                <a:solidFill>
+                  <a:srgbClr val="1F2937"/>
+                </a:solidFill>
+                <a:latin typeface="Calibri"/>
+              </a:rPr>
+              <a:t>•  Risk varies by field: higher stakes need more constraint and earlier review</a:t>
+            </a:r>
+          </a:p>
+          <a:p>
+            <a:pPr>
+              <a:lnSpc>
+                <a:spcPct val="115000"/>
+              </a:lnSpc>
+              <a:spcAft>
+                <a:spcPts val="1000"/>
+              </a:spcAft>
+            </a:pPr>
+          </a:p>
+          <a:p>
+            <a:pPr>
+              <a:lnSpc>
+                <a:spcPct val="115000"/>
+              </a:lnSpc>
+              <a:spcAft>
+                <a:spcPts val="1000"/>
+              </a:spcAft>
+            </a:pPr>
+            <a:r>
+              <a:rPr sz="1900" b="1" i="0">
+                <a:solidFill>
+                  <a:srgbClr val="1F2937"/>
+                </a:solidFill>
+                <a:latin typeface="Calibri"/>
+              </a:rPr>
+              <a:t>•  Next week:</a:t>
+            </a:r>
+          </a:p>
+          <a:p>
+            <a:pPr lvl="1">
+              <a:lnSpc>
+                <a:spcPct val="115000"/>
+              </a:lnSpc>
+              <a:spcAft>
+                <a:spcPts val="500"/>
+              </a:spcAft>
+            </a:pPr>
+            <a:r>
+              <a:rPr sz="1600" b="0" i="0">
+                <a:solidFill>
+                  <a:srgbClr val="333D4B"/>
+                </a:solidFill>
+                <a:latin typeface="Calibri"/>
+              </a:rPr>
+              <a:t>—  Prompt Injection and AI Security — we attack an assistant together and see how easy it is</a:t>
+            </a:r>
+          </a:p>
+        </p:txBody>
+      </p:sp>
+      <p:sp>
+        <p:nvSpPr>
+          <p:cNvPr id="5" name="TextBox 4"/>
+          <p:cNvSpPr txBox="1"/>
+          <p:nvPr/>
+        </p:nvSpPr>
+        <p:spPr>
+          <a:xfrm>
+            <a:off x="777240" y="6355080"/>
+            <a:ext cx="10637215" cy="274320"/>
+          </a:xfrm>
+          <a:prstGeom prst="rect">
+            <a:avLst/>
+          </a:prstGeom>
+          <a:noFill/>
+        </p:spPr>
+        <p:txBody>
+          <a:bodyPr wrap="square" lIns="0" rIns="0" tIns="0" bIns="0">
+            <a:spAutoFit/>
+          </a:bodyPr>
+          <a:lstStyle/>
+          <a:p>
+            <a:r>
+              <a:rPr sz="1000" b="0" i="0">
+                <a:solidFill>
+                  <a:srgbClr val="6B7787"/>
+                </a:solidFill>
+                <a:latin typeface="Calibri"/>
+              </a:rPr>
+              <a:t>Week 11  ·  Prompt Engineering and Large Language Models</a:t>
+            </a:r>
+          </a:p>
+        </p:txBody>
+      </p:sp>
+      <p:sp>
+        <p:nvSpPr>
+          <p:cNvPr id="6" name="TextBox 5"/>
+          <p:cNvSpPr txBox="1"/>
+          <p:nvPr/>
+        </p:nvSpPr>
+        <p:spPr>
+          <a:xfrm>
+            <a:off x="10500055" y="6355080"/>
+            <a:ext cx="914400" cy="274320"/>
+          </a:xfrm>
+          <a:prstGeom prst="rect">
+            <a:avLst/>
+          </a:prstGeom>
+          <a:noFill/>
+        </p:spPr>
+        <p:txBody>
+          <a:bodyPr wrap="square" lIns="0" rIns="0" tIns="0" bIns="0">
+            <a:spAutoFit/>
+          </a:bodyPr>
+          <a:lstStyle/>
+          <a:p>
+            <a:pPr algn="r"/>
+            <a:r>
+              <a:rPr sz="1000" b="0" i="0">
+                <a:solidFill>
+                  <a:srgbClr val="6B7787"/>
+                </a:solidFill>
+                <a:latin typeface="Calibri"/>
+              </a:rPr>
+              <a:t>18</a:t>
+            </a:r>
+          </a:p>
+        </p:txBody>
+      </p:sp>
+    </p:spTree>
+  </p:cSld>
+  <p:clrMapOvr>
+    <a:masterClrMapping/>
+  </p:clrMapOvr>
+</p:sld>
+</file>
+
+<file path=ppt/slides/slide19.xml><?xml version="1.0" encoding="utf-8"?>
 <p:sld xmlns:a="http://schemas.openxmlformats.org/drawingml/2006/main" xmlns:p="http://schemas.openxmlformats.org/presentationml/2006/main" xmlns:r="http://schemas.openxmlformats.org/officeDocument/2006/relationships">
   <p:cSld>
     <p:spTree>
